--- a/Weaver Presentation.pptx
+++ b/Weaver Presentation.pptx
@@ -5,20 +5,21 @@
     <p:sldMasterId id="2147483705" r:id="rId4"/>
   </p:sldMasterIdLst>
   <p:notesMasterIdLst>
-    <p:notesMasterId r:id="rId13"/>
+    <p:notesMasterId r:id="rId14"/>
   </p:notesMasterIdLst>
   <p:handoutMasterIdLst>
-    <p:handoutMasterId r:id="rId14"/>
+    <p:handoutMasterId r:id="rId15"/>
   </p:handoutMasterIdLst>
   <p:sldIdLst>
     <p:sldId id="278" r:id="rId5"/>
     <p:sldId id="282" r:id="rId6"/>
-    <p:sldId id="284" r:id="rId7"/>
-    <p:sldId id="286" r:id="rId8"/>
-    <p:sldId id="287" r:id="rId9"/>
-    <p:sldId id="288" r:id="rId10"/>
-    <p:sldId id="289" r:id="rId11"/>
-    <p:sldId id="292" r:id="rId12"/>
+    <p:sldId id="293" r:id="rId7"/>
+    <p:sldId id="284" r:id="rId8"/>
+    <p:sldId id="286" r:id="rId9"/>
+    <p:sldId id="287" r:id="rId10"/>
+    <p:sldId id="288" r:id="rId11"/>
+    <p:sldId id="289" r:id="rId12"/>
+    <p:sldId id="292" r:id="rId13"/>
   </p:sldIdLst>
   <p:sldSz cx="12192000" cy="6858000"/>
   <p:notesSz cx="6858000" cy="9144000"/>
@@ -233,7 +234,7 @@
           <a:p>
             <a:fld id="{717BC71B-6527-4638-937B-C93EB849CB02}" type="datetimeFigureOut">
               <a:rPr lang="en-US" smtClean="0"/>
-              <a:t>6/24/2026</a:t>
+              <a:t>6/25/2026</a:t>
             </a:fld>
             <a:endParaRPr lang="en-US" dirty="0"/>
           </a:p>
@@ -410,7 +411,7 @@
           <a:p>
             <a:fld id="{425465A2-8C9C-419F-9FD8-234480873777}" type="datetimeFigureOut">
               <a:rPr lang="en-US" smtClean="0"/>
-              <a:t>6/24/2026</a:t>
+              <a:t>6/25/2026</a:t>
             </a:fld>
             <a:endParaRPr lang="en-US" dirty="0"/>
           </a:p>
@@ -910,7 +911,7 @@
           <a:p>
             <a:fld id="{E7AF00E9-A49D-4007-B3B9-A3783809E505}" type="slidenum">
               <a:rPr lang="en-US" smtClean="0"/>
-              <a:t>3</a:t>
+              <a:t>4</a:t>
             </a:fld>
             <a:endParaRPr lang="en-US" dirty="0"/>
           </a:p>
@@ -994,7 +995,7 @@
           <a:p>
             <a:fld id="{E7AF00E9-A49D-4007-B3B9-A3783809E505}" type="slidenum">
               <a:rPr lang="en-US" smtClean="0"/>
-              <a:t>4</a:t>
+              <a:t>5</a:t>
             </a:fld>
             <a:endParaRPr lang="en-US" dirty="0"/>
           </a:p>
@@ -15488,9 +15489,10 @@
           </a:bodyPr>
           <a:lstStyle/>
           <a:p>
+            <a:pPr algn="ctr"/>
             <a:r>
               <a:rPr lang="en-US" dirty="0"/>
-              <a:t>Basic presentation</a:t>
+              <a:t>West Region Next Steps</a:t>
             </a:r>
           </a:p>
         </p:txBody>
@@ -15540,6 +15542,14 @@
 <file path=ppt/slides/slide2.xml><?xml version="1.0" encoding="utf-8"?>
 <p:sld xmlns:a="http://schemas.openxmlformats.org/drawingml/2006/main" xmlns:r="http://schemas.openxmlformats.org/officeDocument/2006/relationships" xmlns:p="http://schemas.openxmlformats.org/presentationml/2006/main">
   <p:cSld>
+    <p:bg>
+      <p:bgPr>
+        <a:solidFill>
+          <a:schemeClr val="bg2"/>
+        </a:solidFill>
+        <a:effectLst/>
+      </p:bgPr>
+    </p:bg>
     <p:spTree>
       <p:nvGrpSpPr>
         <p:cNvPr id="1" name=""/>
@@ -15554,6 +15564,570 @@
           <a:chExt cx="0" cy="0"/>
         </a:xfrm>
       </p:grpSpPr>
+      <p:grpSp>
+        <p:nvGrpSpPr>
+          <p:cNvPr id="10" name="Group 9">
+            <a:extLst>
+              <a:ext uri="{FF2B5EF4-FFF2-40B4-BE49-F238E27FC236}">
+                <a16:creationId xmlns:a16="http://schemas.microsoft.com/office/drawing/2014/main" id="{3BDBC526-6DCD-4FF6-8395-D8C22E46E527}"/>
+              </a:ext>
+              <a:ext uri="{C183D7F6-B498-43B3-948B-1728B52AA6E4}">
+                <adec:decorative xmlns:adec="http://schemas.microsoft.com/office/drawing/2017/decorative" val="1"/>
+              </a:ext>
+            </a:extLst>
+          </p:cNvPr>
+          <p:cNvGrpSpPr>
+            <a:grpSpLocks noGrp="1" noUngrp="1" noRot="1" noChangeAspect="1" noMove="1" noResize="1"/>
+          </p:cNvGrpSpPr>
+          <p:nvPr>
+            <p:extLst>
+              <p:ext uri="{386F3935-93C4-4BCD-93E2-E3B085C9AB24}">
+                <p16:designElem xmlns:p16="http://schemas.microsoft.com/office/powerpoint/2015/main" val="1"/>
+              </p:ext>
+            </p:extLst>
+          </p:nvPr>
+        </p:nvGrpSpPr>
+        <p:grpSpPr>
+          <a:xfrm>
+            <a:off x="613998" y="5334748"/>
+            <a:ext cx="678135" cy="990000"/>
+            <a:chOff x="10490969" y="1448827"/>
+            <a:chExt cx="678135" cy="990000"/>
+          </a:xfrm>
+        </p:grpSpPr>
+        <p:sp>
+          <p:nvSpPr>
+            <p:cNvPr id="11" name="Freeform: Shape 10">
+              <a:extLst>
+                <a:ext uri="{FF2B5EF4-FFF2-40B4-BE49-F238E27FC236}">
+                  <a16:creationId xmlns:a16="http://schemas.microsoft.com/office/drawing/2014/main" id="{02ECB475-568C-47AC-B16D-2E202DEB2DE0}"/>
+                </a:ext>
+                <a:ext uri="{C183D7F6-B498-43B3-948B-1728B52AA6E4}">
+                  <adec:decorative xmlns:adec="http://schemas.microsoft.com/office/drawing/2017/decorative" val="1"/>
+                </a:ext>
+              </a:extLst>
+            </p:cNvPr>
+            <p:cNvSpPr>
+              <a:spLocks noChangeAspect="1"/>
+            </p:cNvSpPr>
+            <p:nvPr>
+              <p:extLst>
+                <p:ext uri="{386F3935-93C4-4BCD-93E2-E3B085C9AB24}">
+                  <p16:designElem xmlns:p16="http://schemas.microsoft.com/office/powerpoint/2015/main" val="1"/>
+                </p:ext>
+              </p:extLst>
+            </p:nvPr>
+          </p:nvSpPr>
+          <p:spPr>
+            <a:xfrm rot="2700000" flipH="1" flipV="1">
+              <a:off x="10268976" y="1743588"/>
+              <a:ext cx="926985" cy="463493"/>
+            </a:xfrm>
+            <a:custGeom>
+              <a:avLst/>
+              <a:gdLst>
+                <a:gd name="connsiteX0" fmla="*/ 1329373 w 2658746"/>
+                <a:gd name="connsiteY0" fmla="*/ 0 h 1329373"/>
+                <a:gd name="connsiteX1" fmla="*/ 2658746 w 2658746"/>
+                <a:gd name="connsiteY1" fmla="*/ 1329373 h 1329373"/>
+                <a:gd name="connsiteX2" fmla="*/ 1994059 w 2658746"/>
+                <a:gd name="connsiteY2" fmla="*/ 1329373 h 1329373"/>
+                <a:gd name="connsiteX3" fmla="*/ 1329373 w 2658746"/>
+                <a:gd name="connsiteY3" fmla="*/ 664687 h 1329373"/>
+                <a:gd name="connsiteX4" fmla="*/ 664687 w 2658746"/>
+                <a:gd name="connsiteY4" fmla="*/ 1329373 h 1329373"/>
+                <a:gd name="connsiteX5" fmla="*/ 0 w 2658746"/>
+                <a:gd name="connsiteY5" fmla="*/ 1329373 h 1329373"/>
+                <a:gd name="connsiteX6" fmla="*/ 1329373 w 2658746"/>
+                <a:gd name="connsiteY6" fmla="*/ 0 h 1329373"/>
+              </a:gdLst>
+              <a:ahLst/>
+              <a:cxnLst>
+                <a:cxn ang="0">
+                  <a:pos x="connsiteX0" y="connsiteY0"/>
+                </a:cxn>
+                <a:cxn ang="0">
+                  <a:pos x="connsiteX1" y="connsiteY1"/>
+                </a:cxn>
+                <a:cxn ang="0">
+                  <a:pos x="connsiteX2" y="connsiteY2"/>
+                </a:cxn>
+                <a:cxn ang="0">
+                  <a:pos x="connsiteX3" y="connsiteY3"/>
+                </a:cxn>
+                <a:cxn ang="0">
+                  <a:pos x="connsiteX4" y="connsiteY4"/>
+                </a:cxn>
+                <a:cxn ang="0">
+                  <a:pos x="connsiteX5" y="connsiteY5"/>
+                </a:cxn>
+                <a:cxn ang="0">
+                  <a:pos x="connsiteX6" y="connsiteY6"/>
+                </a:cxn>
+              </a:cxnLst>
+              <a:rect l="l" t="t" r="r" b="b"/>
+              <a:pathLst>
+                <a:path w="2658746" h="1329373">
+                  <a:moveTo>
+                    <a:pt x="1329373" y="0"/>
+                  </a:moveTo>
+                  <a:cubicBezTo>
+                    <a:pt x="2063565" y="0"/>
+                    <a:pt x="2658746" y="595181"/>
+                    <a:pt x="2658746" y="1329373"/>
+                  </a:cubicBezTo>
+                  <a:lnTo>
+                    <a:pt x="1994059" y="1329373"/>
+                  </a:lnTo>
+                  <a:cubicBezTo>
+                    <a:pt x="1994059" y="962277"/>
+                    <a:pt x="1696469" y="664687"/>
+                    <a:pt x="1329373" y="664687"/>
+                  </a:cubicBezTo>
+                  <a:cubicBezTo>
+                    <a:pt x="962277" y="664687"/>
+                    <a:pt x="664687" y="962277"/>
+                    <a:pt x="664687" y="1329373"/>
+                  </a:cubicBezTo>
+                  <a:lnTo>
+                    <a:pt x="0" y="1329373"/>
+                  </a:lnTo>
+                  <a:cubicBezTo>
+                    <a:pt x="0" y="595181"/>
+                    <a:pt x="595181" y="0"/>
+                    <a:pt x="1329373" y="0"/>
+                  </a:cubicBezTo>
+                  <a:close/>
+                </a:path>
+              </a:pathLst>
+            </a:custGeom>
+            <a:solidFill>
+              <a:schemeClr val="bg2"/>
+            </a:solidFill>
+            <a:ln>
+              <a:noFill/>
+            </a:ln>
+            <a:effectLst>
+              <a:innerShdw blurRad="127000" dist="50800" dir="13500000">
+                <a:schemeClr val="accent1">
+                  <a:lumMod val="40000"/>
+                  <a:lumOff val="60000"/>
+                  <a:alpha val="20000"/>
+                </a:schemeClr>
+              </a:innerShdw>
+            </a:effectLst>
+          </p:spPr>
+          <p:style>
+            <a:lnRef idx="2">
+              <a:schemeClr val="accent1">
+                <a:shade val="50000"/>
+              </a:schemeClr>
+            </a:lnRef>
+            <a:fillRef idx="1">
+              <a:schemeClr val="accent1"/>
+            </a:fillRef>
+            <a:effectRef idx="0">
+              <a:schemeClr val="accent1"/>
+            </a:effectRef>
+            <a:fontRef idx="minor">
+              <a:schemeClr val="lt1"/>
+            </a:fontRef>
+          </p:style>
+          <p:txBody>
+            <a:bodyPr rtlCol="0" anchor="ctr"/>
+            <a:lstStyle/>
+            <a:p>
+              <a:pPr algn="ctr"/>
+              <a:endParaRPr lang="en-US" dirty="0">
+                <a:solidFill>
+                  <a:schemeClr val="tx1"/>
+                </a:solidFill>
+              </a:endParaRPr>
+            </a:p>
+          </p:txBody>
+        </p:sp>
+        <p:sp>
+          <p:nvSpPr>
+            <p:cNvPr id="12" name="Oval 11">
+              <a:extLst>
+                <a:ext uri="{FF2B5EF4-FFF2-40B4-BE49-F238E27FC236}">
+                  <a16:creationId xmlns:a16="http://schemas.microsoft.com/office/drawing/2014/main" id="{080D8764-525A-441E-B58F-068E82F09714}"/>
+                </a:ext>
+                <a:ext uri="{C183D7F6-B498-43B3-948B-1728B52AA6E4}">
+                  <adec:decorative xmlns:adec="http://schemas.microsoft.com/office/drawing/2017/decorative" val="1"/>
+                </a:ext>
+              </a:extLst>
+            </p:cNvPr>
+            <p:cNvSpPr/>
+            <p:nvPr>
+              <p:extLst>
+                <p:ext uri="{386F3935-93C4-4BCD-93E2-E3B085C9AB24}">
+                  <p16:designElem xmlns:p16="http://schemas.microsoft.com/office/powerpoint/2015/main" val="1"/>
+                </p:ext>
+              </p:extLst>
+            </p:nvPr>
+          </p:nvSpPr>
+          <p:spPr>
+            <a:xfrm rot="8100000" flipH="1" flipV="1">
+              <a:off x="11115555" y="1939340"/>
+              <a:ext cx="53549" cy="233295"/>
+            </a:xfrm>
+            <a:prstGeom prst="ellipse">
+              <a:avLst/>
+            </a:prstGeom>
+            <a:solidFill>
+              <a:schemeClr val="bg2">
+                <a:lumMod val="90000"/>
+                <a:lumOff val="10000"/>
+              </a:schemeClr>
+            </a:solidFill>
+            <a:ln>
+              <a:noFill/>
+            </a:ln>
+            <a:effectLst>
+              <a:innerShdw blurRad="63500" dist="2540000">
+                <a:schemeClr val="accent1">
+                  <a:lumMod val="60000"/>
+                  <a:lumOff val="40000"/>
+                  <a:alpha val="0"/>
+                </a:schemeClr>
+              </a:innerShdw>
+            </a:effectLst>
+          </p:spPr>
+          <p:style>
+            <a:lnRef idx="2">
+              <a:schemeClr val="accent1">
+                <a:shade val="50000"/>
+              </a:schemeClr>
+            </a:lnRef>
+            <a:fillRef idx="1">
+              <a:schemeClr val="accent1"/>
+            </a:fillRef>
+            <a:effectRef idx="0">
+              <a:schemeClr val="accent1"/>
+            </a:effectRef>
+            <a:fontRef idx="minor">
+              <a:schemeClr val="lt1"/>
+            </a:fontRef>
+          </p:style>
+          <p:txBody>
+            <a:bodyPr rot="0" spcFirstLastPara="0" vertOverflow="overflow" horzOverflow="overflow" vert="horz" wrap="square" lIns="91440" tIns="45720" rIns="91440" bIns="45720" numCol="1" spcCol="0" rtlCol="0" fromWordArt="0" anchor="ctr" anchorCtr="0" forceAA="0" compatLnSpc="1">
+              <a:prstTxWarp prst="textNoShape">
+                <a:avLst/>
+              </a:prstTxWarp>
+              <a:noAutofit/>
+            </a:bodyPr>
+            <a:lstStyle/>
+            <a:p>
+              <a:pPr algn="ctr"/>
+              <a:endParaRPr lang="en-US"/>
+            </a:p>
+          </p:txBody>
+        </p:sp>
+        <p:sp>
+          <p:nvSpPr>
+            <p:cNvPr id="13" name="Oval 12">
+              <a:extLst>
+                <a:ext uri="{FF2B5EF4-FFF2-40B4-BE49-F238E27FC236}">
+                  <a16:creationId xmlns:a16="http://schemas.microsoft.com/office/drawing/2014/main" id="{11196109-6F2B-4738-B2FC-2CCC753AABD4}"/>
+                </a:ext>
+                <a:ext uri="{C183D7F6-B498-43B3-948B-1728B52AA6E4}">
+                  <adec:decorative xmlns:adec="http://schemas.microsoft.com/office/drawing/2017/decorative" val="1"/>
+                </a:ext>
+              </a:extLst>
+            </p:cNvPr>
+            <p:cNvSpPr/>
+            <p:nvPr>
+              <p:extLst>
+                <p:ext uri="{386F3935-93C4-4BCD-93E2-E3B085C9AB24}">
+                  <p16:designElem xmlns:p16="http://schemas.microsoft.com/office/powerpoint/2015/main" val="1"/>
+                </p:ext>
+              </p:extLst>
+            </p:nvPr>
+          </p:nvSpPr>
+          <p:spPr>
+            <a:xfrm rot="8100000" flipH="1" flipV="1">
+              <a:off x="10625042" y="1448827"/>
+              <a:ext cx="53549" cy="233295"/>
+            </a:xfrm>
+            <a:prstGeom prst="ellipse">
+              <a:avLst/>
+            </a:prstGeom>
+            <a:solidFill>
+              <a:schemeClr val="bg2">
+                <a:lumMod val="90000"/>
+                <a:lumOff val="10000"/>
+              </a:schemeClr>
+            </a:solidFill>
+            <a:ln>
+              <a:noFill/>
+            </a:ln>
+            <a:effectLst>
+              <a:innerShdw blurRad="63500" dist="2540000">
+                <a:schemeClr val="accent1">
+                  <a:lumMod val="60000"/>
+                  <a:lumOff val="40000"/>
+                  <a:alpha val="0"/>
+                </a:schemeClr>
+              </a:innerShdw>
+            </a:effectLst>
+          </p:spPr>
+          <p:style>
+            <a:lnRef idx="2">
+              <a:schemeClr val="accent1">
+                <a:shade val="50000"/>
+              </a:schemeClr>
+            </a:lnRef>
+            <a:fillRef idx="1">
+              <a:schemeClr val="accent1"/>
+            </a:fillRef>
+            <a:effectRef idx="0">
+              <a:schemeClr val="accent1"/>
+            </a:effectRef>
+            <a:fontRef idx="minor">
+              <a:schemeClr val="lt1"/>
+            </a:fontRef>
+          </p:style>
+          <p:txBody>
+            <a:bodyPr rot="0" spcFirstLastPara="0" vertOverflow="overflow" horzOverflow="overflow" vert="horz" wrap="square" lIns="91440" tIns="45720" rIns="91440" bIns="45720" numCol="1" spcCol="0" rtlCol="0" fromWordArt="0" anchor="ctr" anchorCtr="0" forceAA="0" compatLnSpc="1">
+              <a:prstTxWarp prst="textNoShape">
+                <a:avLst/>
+              </a:prstTxWarp>
+              <a:noAutofit/>
+            </a:bodyPr>
+            <a:lstStyle/>
+            <a:p>
+              <a:pPr algn="ctr"/>
+              <a:endParaRPr lang="en-US"/>
+            </a:p>
+          </p:txBody>
+        </p:sp>
+        <p:sp>
+          <p:nvSpPr>
+            <p:cNvPr id="14" name="Freeform: Shape 13">
+              <a:extLst>
+                <a:ext uri="{FF2B5EF4-FFF2-40B4-BE49-F238E27FC236}">
+                  <a16:creationId xmlns:a16="http://schemas.microsoft.com/office/drawing/2014/main" id="{F7E468C2-69B8-470B-85E3-801A3CB1D7E2}"/>
+                </a:ext>
+                <a:ext uri="{C183D7F6-B498-43B3-948B-1728B52AA6E4}">
+                  <adec:decorative xmlns:adec="http://schemas.microsoft.com/office/drawing/2017/decorative" val="1"/>
+                </a:ext>
+              </a:extLst>
+            </p:cNvPr>
+            <p:cNvSpPr>
+              <a:spLocks noChangeAspect="1"/>
+            </p:cNvSpPr>
+            <p:nvPr>
+              <p:extLst>
+                <p:ext uri="{386F3935-93C4-4BCD-93E2-E3B085C9AB24}">
+                  <p16:designElem xmlns:p16="http://schemas.microsoft.com/office/powerpoint/2015/main" val="1"/>
+                </p:ext>
+              </p:extLst>
+            </p:nvPr>
+          </p:nvSpPr>
+          <p:spPr>
+            <a:xfrm rot="2700000" flipH="1" flipV="1">
+              <a:off x="10292519" y="1686748"/>
+              <a:ext cx="926985" cy="530086"/>
+            </a:xfrm>
+            <a:custGeom>
+              <a:avLst/>
+              <a:gdLst>
+                <a:gd name="connsiteX0" fmla="*/ 1329373 w 2658746"/>
+                <a:gd name="connsiteY0" fmla="*/ 0 h 1329373"/>
+                <a:gd name="connsiteX1" fmla="*/ 2658746 w 2658746"/>
+                <a:gd name="connsiteY1" fmla="*/ 1329373 h 1329373"/>
+                <a:gd name="connsiteX2" fmla="*/ 1994059 w 2658746"/>
+                <a:gd name="connsiteY2" fmla="*/ 1329373 h 1329373"/>
+                <a:gd name="connsiteX3" fmla="*/ 1329373 w 2658746"/>
+                <a:gd name="connsiteY3" fmla="*/ 664687 h 1329373"/>
+                <a:gd name="connsiteX4" fmla="*/ 664687 w 2658746"/>
+                <a:gd name="connsiteY4" fmla="*/ 1329373 h 1329373"/>
+                <a:gd name="connsiteX5" fmla="*/ 0 w 2658746"/>
+                <a:gd name="connsiteY5" fmla="*/ 1329373 h 1329373"/>
+                <a:gd name="connsiteX6" fmla="*/ 1329373 w 2658746"/>
+                <a:gd name="connsiteY6" fmla="*/ 0 h 1329373"/>
+              </a:gdLst>
+              <a:ahLst/>
+              <a:cxnLst>
+                <a:cxn ang="0">
+                  <a:pos x="connsiteX0" y="connsiteY0"/>
+                </a:cxn>
+                <a:cxn ang="0">
+                  <a:pos x="connsiteX1" y="connsiteY1"/>
+                </a:cxn>
+                <a:cxn ang="0">
+                  <a:pos x="connsiteX2" y="connsiteY2"/>
+                </a:cxn>
+                <a:cxn ang="0">
+                  <a:pos x="connsiteX3" y="connsiteY3"/>
+                </a:cxn>
+                <a:cxn ang="0">
+                  <a:pos x="connsiteX4" y="connsiteY4"/>
+                </a:cxn>
+                <a:cxn ang="0">
+                  <a:pos x="connsiteX5" y="connsiteY5"/>
+                </a:cxn>
+                <a:cxn ang="0">
+                  <a:pos x="connsiteX6" y="connsiteY6"/>
+                </a:cxn>
+              </a:cxnLst>
+              <a:rect l="l" t="t" r="r" b="b"/>
+              <a:pathLst>
+                <a:path w="2658746" h="1329373">
+                  <a:moveTo>
+                    <a:pt x="1329373" y="0"/>
+                  </a:moveTo>
+                  <a:cubicBezTo>
+                    <a:pt x="2063565" y="0"/>
+                    <a:pt x="2658746" y="595181"/>
+                    <a:pt x="2658746" y="1329373"/>
+                  </a:cubicBezTo>
+                  <a:lnTo>
+                    <a:pt x="1994059" y="1329373"/>
+                  </a:lnTo>
+                  <a:cubicBezTo>
+                    <a:pt x="1994059" y="962277"/>
+                    <a:pt x="1696469" y="664687"/>
+                    <a:pt x="1329373" y="664687"/>
+                  </a:cubicBezTo>
+                  <a:cubicBezTo>
+                    <a:pt x="962277" y="664687"/>
+                    <a:pt x="664687" y="962277"/>
+                    <a:pt x="664687" y="1329373"/>
+                  </a:cubicBezTo>
+                  <a:lnTo>
+                    <a:pt x="0" y="1329373"/>
+                  </a:lnTo>
+                  <a:cubicBezTo>
+                    <a:pt x="0" y="595181"/>
+                    <a:pt x="595181" y="0"/>
+                    <a:pt x="1329373" y="0"/>
+                  </a:cubicBezTo>
+                  <a:close/>
+                </a:path>
+              </a:pathLst>
+            </a:custGeom>
+            <a:solidFill>
+              <a:schemeClr val="bg2">
+                <a:lumMod val="50000"/>
+                <a:lumOff val="50000"/>
+                <a:alpha val="20000"/>
+              </a:schemeClr>
+            </a:solidFill>
+            <a:ln>
+              <a:noFill/>
+            </a:ln>
+            <a:effectLst>
+              <a:softEdge rad="101600"/>
+            </a:effectLst>
+          </p:spPr>
+          <p:style>
+            <a:lnRef idx="2">
+              <a:schemeClr val="accent1">
+                <a:shade val="50000"/>
+              </a:schemeClr>
+            </a:lnRef>
+            <a:fillRef idx="1">
+              <a:schemeClr val="accent1"/>
+            </a:fillRef>
+            <a:effectRef idx="0">
+              <a:schemeClr val="accent1"/>
+            </a:effectRef>
+            <a:fontRef idx="minor">
+              <a:schemeClr val="lt1"/>
+            </a:fontRef>
+          </p:style>
+          <p:txBody>
+            <a:bodyPr rtlCol="0" anchor="ctr"/>
+            <a:lstStyle/>
+            <a:p>
+              <a:pPr algn="ctr"/>
+              <a:endParaRPr lang="en-US" dirty="0">
+                <a:solidFill>
+                  <a:schemeClr val="tx1"/>
+                </a:solidFill>
+              </a:endParaRPr>
+            </a:p>
+          </p:txBody>
+        </p:sp>
+      </p:grpSp>
+      <p:sp useBgFill="1">
+        <p:nvSpPr>
+          <p:cNvPr id="16" name="Rectangle 15">
+            <a:extLst>
+              <a:ext uri="{FF2B5EF4-FFF2-40B4-BE49-F238E27FC236}">
+                <a16:creationId xmlns:a16="http://schemas.microsoft.com/office/drawing/2014/main" id="{A5931BE0-4B93-4D6C-878E-ACC59D6B4587}"/>
+              </a:ext>
+              <a:ext uri="{C183D7F6-B498-43B3-948B-1728B52AA6E4}">
+                <adec:decorative xmlns:adec="http://schemas.microsoft.com/office/drawing/2017/decorative" val="1"/>
+              </a:ext>
+            </a:extLst>
+          </p:cNvPr>
+          <p:cNvSpPr>
+            <a:spLocks noGrp="1" noRot="1" noChangeAspect="1" noMove="1" noResize="1" noEditPoints="1" noAdjustHandles="1" noChangeArrowheads="1" noChangeShapeType="1" noTextEdit="1"/>
+          </p:cNvSpPr>
+          <p:nvPr>
+            <p:extLst>
+              <p:ext uri="{386F3935-93C4-4BCD-93E2-E3B085C9AB24}">
+                <p16:designElem xmlns:p16="http://schemas.microsoft.com/office/powerpoint/2015/main" val="1"/>
+              </p:ext>
+            </p:extLst>
+          </p:nvPr>
+        </p:nvSpPr>
+        <p:spPr>
+          <a:xfrm>
+            <a:off x="0" y="0"/>
+            <a:ext cx="12192000" cy="6858000"/>
+          </a:xfrm>
+          <a:prstGeom prst="rect">
+            <a:avLst/>
+          </a:prstGeom>
+          <a:ln w="12700" cap="flat" cmpd="sng" algn="ctr">
+            <a:noFill/>
+            <a:prstDash val="solid"/>
+            <a:miter lim="800000"/>
+          </a:ln>
+          <a:effectLst/>
+          <a:extLst>
+            <a:ext uri="{91240B29-F687-4F45-9708-019B960494DF}">
+              <a14:hiddenLine xmlns:a14="http://schemas.microsoft.com/office/drawing/2010/main" w="12700" cap="flat" cmpd="sng" algn="ctr">
+                <a:solidFill>
+                  <a:schemeClr val="accent1">
+                    <a:shade val="50000"/>
+                  </a:schemeClr>
+                </a:solidFill>
+                <a:prstDash val="solid"/>
+                <a:miter lim="800000"/>
+              </a14:hiddenLine>
+            </a:ext>
+          </a:extLst>
+        </p:spPr>
+        <p:style>
+          <a:lnRef idx="2">
+            <a:schemeClr val="accent1">
+              <a:shade val="50000"/>
+            </a:schemeClr>
+          </a:lnRef>
+          <a:fillRef idx="1">
+            <a:schemeClr val="accent1"/>
+          </a:fillRef>
+          <a:effectRef idx="0">
+            <a:schemeClr val="accent1"/>
+          </a:effectRef>
+          <a:fontRef idx="minor">
+            <a:schemeClr val="lt1"/>
+          </a:fontRef>
+        </p:style>
+        <p:txBody>
+          <a:bodyPr rtlCol="0" anchor="ctr"/>
+          <a:lstStyle/>
+          <a:p>
+            <a:pPr algn="ctr"/>
+            <a:endParaRPr lang="en-US"/>
+          </a:p>
+        </p:txBody>
+      </p:sp>
       <p:sp>
         <p:nvSpPr>
           <p:cNvPr id="2" name="Title 1">
@@ -15570,15 +16144,616 @@
             <p:ph type="title"/>
           </p:nvPr>
         </p:nvSpPr>
-        <p:spPr/>
+        <p:spPr>
+          <a:xfrm>
+            <a:off x="550864" y="549275"/>
+            <a:ext cx="3565524" cy="1997855"/>
+          </a:xfrm>
+        </p:spPr>
         <p:txBody>
-          <a:bodyPr/>
+          <a:bodyPr vert="horz" wrap="square" lIns="0" tIns="0" rIns="0" bIns="0" rtlCol="0" anchor="b" anchorCtr="0">
+            <a:normAutofit/>
+          </a:bodyPr>
           <a:lstStyle/>
           <a:p>
+            <a:pPr>
+              <a:lnSpc>
+                <a:spcPct val="100000"/>
+              </a:lnSpc>
+            </a:pPr>
             <a:r>
-              <a:rPr lang="en-US" dirty="0"/>
+              <a:rPr lang="en-US" sz="4800"/>
               <a:t>Planning</a:t>
             </a:r>
+          </a:p>
+        </p:txBody>
+      </p:sp>
+      <p:grpSp>
+        <p:nvGrpSpPr>
+          <p:cNvPr id="18" name="Group 17">
+            <a:extLst>
+              <a:ext uri="{FF2B5EF4-FFF2-40B4-BE49-F238E27FC236}">
+                <a16:creationId xmlns:a16="http://schemas.microsoft.com/office/drawing/2014/main" id="{9F2D4ED5-DC78-4C88-97AA-483206C53E90}"/>
+              </a:ext>
+              <a:ext uri="{C183D7F6-B498-43B3-948B-1728B52AA6E4}">
+                <adec:decorative xmlns:adec="http://schemas.microsoft.com/office/drawing/2017/decorative" val="1"/>
+              </a:ext>
+            </a:extLst>
+          </p:cNvPr>
+          <p:cNvGrpSpPr>
+            <a:grpSpLocks noGrp="1" noUngrp="1" noRot="1" noChangeAspect="1" noMove="1" noResize="1"/>
+          </p:cNvGrpSpPr>
+          <p:nvPr>
+            <p:extLst>
+              <p:ext uri="{386F3935-93C4-4BCD-93E2-E3B085C9AB24}">
+                <p16:designElem xmlns:p16="http://schemas.microsoft.com/office/powerpoint/2015/main" val="1"/>
+              </p:ext>
+            </p:extLst>
+          </p:nvPr>
+        </p:nvGrpSpPr>
+        <p:grpSpPr>
+          <a:xfrm>
+            <a:off x="10570793" y="0"/>
+            <a:ext cx="1468514" cy="1521012"/>
+            <a:chOff x="5236793" y="2432482"/>
+            <a:chExt cx="1468514" cy="1521012"/>
+          </a:xfrm>
+        </p:grpSpPr>
+        <p:sp>
+          <p:nvSpPr>
+            <p:cNvPr id="19" name="Freeform 5">
+              <a:extLst>
+                <a:ext uri="{FF2B5EF4-FFF2-40B4-BE49-F238E27FC236}">
+                  <a16:creationId xmlns:a16="http://schemas.microsoft.com/office/drawing/2014/main" id="{0DE0B65A-4839-40B2-BA92-1464FEADBA4A}"/>
+                </a:ext>
+                <a:ext uri="{C183D7F6-B498-43B3-948B-1728B52AA6E4}">
+                  <adec:decorative xmlns:adec="http://schemas.microsoft.com/office/drawing/2017/decorative" val="1"/>
+                </a:ext>
+              </a:extLst>
+            </p:cNvPr>
+            <p:cNvSpPr>
+              <a:spLocks/>
+            </p:cNvSpPr>
+            <p:nvPr>
+              <p:extLst>
+                <p:ext uri="{386F3935-93C4-4BCD-93E2-E3B085C9AB24}">
+                  <p16:designElem xmlns:p16="http://schemas.microsoft.com/office/powerpoint/2015/main" val="1"/>
+                </p:ext>
+              </p:extLst>
+            </p:nvPr>
+          </p:nvSpPr>
+          <p:spPr bwMode="auto">
+            <a:xfrm rot="1800000">
+              <a:off x="5463135" y="2432482"/>
+              <a:ext cx="1242172" cy="729202"/>
+            </a:xfrm>
+            <a:custGeom>
+              <a:avLst/>
+              <a:gdLst>
+                <a:gd name="T0" fmla="*/ 266 w 540"/>
+                <a:gd name="T1" fmla="*/ 0 h 317"/>
+                <a:gd name="T2" fmla="*/ 0 w 540"/>
+                <a:gd name="T3" fmla="*/ 158 h 317"/>
+                <a:gd name="T4" fmla="*/ 266 w 540"/>
+                <a:gd name="T5" fmla="*/ 317 h 317"/>
+                <a:gd name="T6" fmla="*/ 540 w 540"/>
+                <a:gd name="T7" fmla="*/ 158 h 317"/>
+                <a:gd name="T8" fmla="*/ 266 w 540"/>
+                <a:gd name="T9" fmla="*/ 0 h 317"/>
+              </a:gdLst>
+              <a:ahLst/>
+              <a:cxnLst>
+                <a:cxn ang="0">
+                  <a:pos x="T0" y="T1"/>
+                </a:cxn>
+                <a:cxn ang="0">
+                  <a:pos x="T2" y="T3"/>
+                </a:cxn>
+                <a:cxn ang="0">
+                  <a:pos x="T4" y="T5"/>
+                </a:cxn>
+                <a:cxn ang="0">
+                  <a:pos x="T6" y="T7"/>
+                </a:cxn>
+                <a:cxn ang="0">
+                  <a:pos x="T8" y="T9"/>
+                </a:cxn>
+              </a:cxnLst>
+              <a:rect l="0" t="0" r="r" b="b"/>
+              <a:pathLst>
+                <a:path w="540" h="317">
+                  <a:moveTo>
+                    <a:pt x="266" y="0"/>
+                  </a:moveTo>
+                  <a:lnTo>
+                    <a:pt x="0" y="158"/>
+                  </a:lnTo>
+                  <a:lnTo>
+                    <a:pt x="266" y="317"/>
+                  </a:lnTo>
+                  <a:lnTo>
+                    <a:pt x="540" y="158"/>
+                  </a:lnTo>
+                  <a:lnTo>
+                    <a:pt x="266" y="0"/>
+                  </a:lnTo>
+                  <a:close/>
+                </a:path>
+              </a:pathLst>
+            </a:custGeom>
+            <a:gradFill flip="none" rotWithShape="1">
+              <a:gsLst>
+                <a:gs pos="20000">
+                  <a:schemeClr val="bg2">
+                    <a:lumMod val="90000"/>
+                    <a:lumOff val="10000"/>
+                    <a:alpha val="20000"/>
+                  </a:schemeClr>
+                </a:gs>
+                <a:gs pos="100000">
+                  <a:schemeClr val="accent1">
+                    <a:lumMod val="60000"/>
+                    <a:lumOff val="40000"/>
+                    <a:alpha val="40000"/>
+                  </a:schemeClr>
+                </a:gs>
+              </a:gsLst>
+              <a:lin ang="0" scaled="0"/>
+              <a:tileRect/>
+            </a:gradFill>
+            <a:ln>
+              <a:noFill/>
+            </a:ln>
+            <a:effectLst>
+              <a:innerShdw blurRad="254000">
+                <a:schemeClr val="bg2">
+                  <a:lumMod val="90000"/>
+                  <a:lumOff val="10000"/>
+                </a:schemeClr>
+              </a:innerShdw>
+            </a:effectLst>
+          </p:spPr>
+          <p:style>
+            <a:lnRef idx="2">
+              <a:schemeClr val="accent1">
+                <a:shade val="50000"/>
+              </a:schemeClr>
+            </a:lnRef>
+            <a:fillRef idx="1">
+              <a:schemeClr val="accent1"/>
+            </a:fillRef>
+            <a:effectRef idx="0">
+              <a:schemeClr val="accent1"/>
+            </a:effectRef>
+            <a:fontRef idx="minor">
+              <a:schemeClr val="lt1"/>
+            </a:fontRef>
+          </p:style>
+          <p:txBody>
+            <a:bodyPr rot="0" spcFirstLastPara="0" vertOverflow="overflow" horzOverflow="overflow" vert="horz" wrap="square" lIns="91440" tIns="45720" rIns="91440" bIns="45720" numCol="1" spcCol="0" rtlCol="0" fromWordArt="0" anchor="ctr" anchorCtr="0" forceAA="0" compatLnSpc="1">
+              <a:prstTxWarp prst="textNoShape">
+                <a:avLst/>
+              </a:prstTxWarp>
+              <a:noAutofit/>
+            </a:bodyPr>
+            <a:lstStyle/>
+            <a:p>
+              <a:pPr algn="ctr"/>
+              <a:endParaRPr lang="en-US"/>
+            </a:p>
+          </p:txBody>
+        </p:sp>
+        <p:sp>
+          <p:nvSpPr>
+            <p:cNvPr id="20" name="Freeform 6">
+              <a:extLst>
+                <a:ext uri="{FF2B5EF4-FFF2-40B4-BE49-F238E27FC236}">
+                  <a16:creationId xmlns:a16="http://schemas.microsoft.com/office/drawing/2014/main" id="{842A0A68-39DD-4DA7-BAD5-63B9C1398718}"/>
+                </a:ext>
+                <a:ext uri="{C183D7F6-B498-43B3-948B-1728B52AA6E4}">
+                  <adec:decorative xmlns:adec="http://schemas.microsoft.com/office/drawing/2017/decorative" val="1"/>
+                </a:ext>
+              </a:extLst>
+            </p:cNvPr>
+            <p:cNvSpPr>
+              <a:spLocks/>
+            </p:cNvSpPr>
+            <p:nvPr>
+              <p:extLst>
+                <p:ext uri="{386F3935-93C4-4BCD-93E2-E3B085C9AB24}">
+                  <p16:designElem xmlns:p16="http://schemas.microsoft.com/office/powerpoint/2015/main" val="1"/>
+                </p:ext>
+              </p:extLst>
+            </p:nvPr>
+          </p:nvSpPr>
+          <p:spPr bwMode="auto">
+            <a:xfrm rot="1800000">
+              <a:off x="5236793" y="2566400"/>
+              <a:ext cx="611884" cy="1076550"/>
+            </a:xfrm>
+            <a:custGeom>
+              <a:avLst/>
+              <a:gdLst>
+                <a:gd name="T0" fmla="*/ 266 w 266"/>
+                <a:gd name="T1" fmla="*/ 468 h 468"/>
+                <a:gd name="T2" fmla="*/ 0 w 266"/>
+                <a:gd name="T3" fmla="*/ 310 h 468"/>
+                <a:gd name="T4" fmla="*/ 0 w 266"/>
+                <a:gd name="T5" fmla="*/ 310 h 468"/>
+                <a:gd name="T6" fmla="*/ 0 w 266"/>
+                <a:gd name="T7" fmla="*/ 0 h 468"/>
+                <a:gd name="T8" fmla="*/ 0 w 266"/>
+                <a:gd name="T9" fmla="*/ 0 h 468"/>
+                <a:gd name="T10" fmla="*/ 266 w 266"/>
+                <a:gd name="T11" fmla="*/ 159 h 468"/>
+                <a:gd name="T12" fmla="*/ 266 w 266"/>
+                <a:gd name="T13" fmla="*/ 468 h 468"/>
+              </a:gdLst>
+              <a:ahLst/>
+              <a:cxnLst>
+                <a:cxn ang="0">
+                  <a:pos x="T0" y="T1"/>
+                </a:cxn>
+                <a:cxn ang="0">
+                  <a:pos x="T2" y="T3"/>
+                </a:cxn>
+                <a:cxn ang="0">
+                  <a:pos x="T4" y="T5"/>
+                </a:cxn>
+                <a:cxn ang="0">
+                  <a:pos x="T6" y="T7"/>
+                </a:cxn>
+                <a:cxn ang="0">
+                  <a:pos x="T8" y="T9"/>
+                </a:cxn>
+                <a:cxn ang="0">
+                  <a:pos x="T10" y="T11"/>
+                </a:cxn>
+                <a:cxn ang="0">
+                  <a:pos x="T12" y="T13"/>
+                </a:cxn>
+              </a:cxnLst>
+              <a:rect l="0" t="0" r="r" b="b"/>
+              <a:pathLst>
+                <a:path w="266" h="468">
+                  <a:moveTo>
+                    <a:pt x="266" y="468"/>
+                  </a:moveTo>
+                  <a:lnTo>
+                    <a:pt x="0" y="310"/>
+                  </a:lnTo>
+                  <a:lnTo>
+                    <a:pt x="0" y="310"/>
+                  </a:lnTo>
+                  <a:lnTo>
+                    <a:pt x="0" y="0"/>
+                  </a:lnTo>
+                  <a:lnTo>
+                    <a:pt x="0" y="0"/>
+                  </a:lnTo>
+                  <a:lnTo>
+                    <a:pt x="266" y="159"/>
+                  </a:lnTo>
+                  <a:lnTo>
+                    <a:pt x="266" y="468"/>
+                  </a:lnTo>
+                  <a:close/>
+                </a:path>
+              </a:pathLst>
+            </a:custGeom>
+            <a:gradFill flip="none" rotWithShape="1">
+              <a:gsLst>
+                <a:gs pos="20000">
+                  <a:schemeClr val="bg2">
+                    <a:lumMod val="90000"/>
+                    <a:lumOff val="10000"/>
+                    <a:alpha val="20000"/>
+                  </a:schemeClr>
+                </a:gs>
+                <a:gs pos="100000">
+                  <a:schemeClr val="accent1">
+                    <a:lumMod val="60000"/>
+                    <a:lumOff val="40000"/>
+                    <a:alpha val="40000"/>
+                  </a:schemeClr>
+                </a:gs>
+              </a:gsLst>
+              <a:lin ang="19800000" scaled="0"/>
+              <a:tileRect/>
+            </a:gradFill>
+            <a:ln>
+              <a:noFill/>
+            </a:ln>
+            <a:effectLst>
+              <a:innerShdw blurRad="254000">
+                <a:schemeClr val="bg2">
+                  <a:lumMod val="90000"/>
+                  <a:lumOff val="10000"/>
+                </a:schemeClr>
+              </a:innerShdw>
+            </a:effectLst>
+          </p:spPr>
+          <p:style>
+            <a:lnRef idx="2">
+              <a:schemeClr val="accent1">
+                <a:shade val="50000"/>
+              </a:schemeClr>
+            </a:lnRef>
+            <a:fillRef idx="1">
+              <a:schemeClr val="accent1"/>
+            </a:fillRef>
+            <a:effectRef idx="0">
+              <a:schemeClr val="accent1"/>
+            </a:effectRef>
+            <a:fontRef idx="minor">
+              <a:schemeClr val="lt1"/>
+            </a:fontRef>
+          </p:style>
+          <p:txBody>
+            <a:bodyPr rot="0" spcFirstLastPara="0" vertOverflow="overflow" horzOverflow="overflow" vert="horz" wrap="square" lIns="91440" tIns="45720" rIns="91440" bIns="45720" numCol="1" spcCol="0" rtlCol="0" fromWordArt="0" anchor="ctr" anchorCtr="0" forceAA="0" compatLnSpc="1">
+              <a:prstTxWarp prst="textNoShape">
+                <a:avLst/>
+              </a:prstTxWarp>
+              <a:noAutofit/>
+            </a:bodyPr>
+            <a:lstStyle/>
+            <a:p>
+              <a:pPr algn="ctr"/>
+              <a:endParaRPr lang="en-US"/>
+            </a:p>
+          </p:txBody>
+        </p:sp>
+        <p:sp>
+          <p:nvSpPr>
+            <p:cNvPr id="21" name="Freeform 8">
+              <a:extLst>
+                <a:ext uri="{FF2B5EF4-FFF2-40B4-BE49-F238E27FC236}">
+                  <a16:creationId xmlns:a16="http://schemas.microsoft.com/office/drawing/2014/main" id="{21A69E50-7E10-45C3-B4F2-19DBA7748498}"/>
+                </a:ext>
+                <a:ext uri="{C183D7F6-B498-43B3-948B-1728B52AA6E4}">
+                  <adec:decorative xmlns:adec="http://schemas.microsoft.com/office/drawing/2017/decorative" val="1"/>
+                </a:ext>
+              </a:extLst>
+            </p:cNvPr>
+            <p:cNvSpPr>
+              <a:spLocks/>
+            </p:cNvSpPr>
+            <p:nvPr>
+              <p:extLst>
+                <p:ext uri="{386F3935-93C4-4BCD-93E2-E3B085C9AB24}">
+                  <p16:designElem xmlns:p16="http://schemas.microsoft.com/office/powerpoint/2015/main" val="1"/>
+                </p:ext>
+              </p:extLst>
+            </p:nvPr>
+          </p:nvSpPr>
+          <p:spPr bwMode="auto">
+            <a:xfrm rot="1800000">
+              <a:off x="5765469" y="2876944"/>
+              <a:ext cx="630288" cy="1076550"/>
+            </a:xfrm>
+            <a:custGeom>
+              <a:avLst/>
+              <a:gdLst>
+                <a:gd name="T0" fmla="*/ 274 w 274"/>
+                <a:gd name="T1" fmla="*/ 0 h 468"/>
+                <a:gd name="T2" fmla="*/ 274 w 274"/>
+                <a:gd name="T3" fmla="*/ 310 h 468"/>
+                <a:gd name="T4" fmla="*/ 274 w 274"/>
+                <a:gd name="T5" fmla="*/ 310 h 468"/>
+                <a:gd name="T6" fmla="*/ 0 w 274"/>
+                <a:gd name="T7" fmla="*/ 468 h 468"/>
+                <a:gd name="T8" fmla="*/ 0 w 274"/>
+                <a:gd name="T9" fmla="*/ 159 h 468"/>
+                <a:gd name="T10" fmla="*/ 274 w 274"/>
+                <a:gd name="T11" fmla="*/ 0 h 468"/>
+                <a:gd name="T12" fmla="*/ 274 w 274"/>
+                <a:gd name="T13" fmla="*/ 0 h 468"/>
+              </a:gdLst>
+              <a:ahLst/>
+              <a:cxnLst>
+                <a:cxn ang="0">
+                  <a:pos x="T0" y="T1"/>
+                </a:cxn>
+                <a:cxn ang="0">
+                  <a:pos x="T2" y="T3"/>
+                </a:cxn>
+                <a:cxn ang="0">
+                  <a:pos x="T4" y="T5"/>
+                </a:cxn>
+                <a:cxn ang="0">
+                  <a:pos x="T6" y="T7"/>
+                </a:cxn>
+                <a:cxn ang="0">
+                  <a:pos x="T8" y="T9"/>
+                </a:cxn>
+                <a:cxn ang="0">
+                  <a:pos x="T10" y="T11"/>
+                </a:cxn>
+                <a:cxn ang="0">
+                  <a:pos x="T12" y="T13"/>
+                </a:cxn>
+              </a:cxnLst>
+              <a:rect l="0" t="0" r="r" b="b"/>
+              <a:pathLst>
+                <a:path w="274" h="468">
+                  <a:moveTo>
+                    <a:pt x="274" y="0"/>
+                  </a:moveTo>
+                  <a:lnTo>
+                    <a:pt x="274" y="310"/>
+                  </a:lnTo>
+                  <a:lnTo>
+                    <a:pt x="274" y="310"/>
+                  </a:lnTo>
+                  <a:lnTo>
+                    <a:pt x="0" y="468"/>
+                  </a:lnTo>
+                  <a:lnTo>
+                    <a:pt x="0" y="159"/>
+                  </a:lnTo>
+                  <a:lnTo>
+                    <a:pt x="274" y="0"/>
+                  </a:lnTo>
+                  <a:lnTo>
+                    <a:pt x="274" y="0"/>
+                  </a:lnTo>
+                  <a:close/>
+                </a:path>
+              </a:pathLst>
+            </a:custGeom>
+            <a:gradFill flip="none" rotWithShape="1">
+              <a:gsLst>
+                <a:gs pos="20000">
+                  <a:schemeClr val="bg2">
+                    <a:lumMod val="90000"/>
+                    <a:lumOff val="10000"/>
+                    <a:alpha val="20000"/>
+                  </a:schemeClr>
+                </a:gs>
+                <a:gs pos="100000">
+                  <a:schemeClr val="accent1">
+                    <a:lumMod val="40000"/>
+                    <a:lumOff val="60000"/>
+                    <a:alpha val="60000"/>
+                  </a:schemeClr>
+                </a:gs>
+              </a:gsLst>
+              <a:lin ang="18000000" scaled="0"/>
+              <a:tileRect/>
+            </a:gradFill>
+            <a:ln>
+              <a:noFill/>
+            </a:ln>
+            <a:effectLst>
+              <a:innerShdw blurRad="508000">
+                <a:schemeClr val="accent1">
+                  <a:lumMod val="60000"/>
+                  <a:lumOff val="40000"/>
+                  <a:alpha val="40000"/>
+                </a:schemeClr>
+              </a:innerShdw>
+            </a:effectLst>
+          </p:spPr>
+          <p:style>
+            <a:lnRef idx="2">
+              <a:schemeClr val="accent1">
+                <a:shade val="50000"/>
+              </a:schemeClr>
+            </a:lnRef>
+            <a:fillRef idx="1">
+              <a:schemeClr val="accent1"/>
+            </a:fillRef>
+            <a:effectRef idx="0">
+              <a:schemeClr val="accent1"/>
+            </a:effectRef>
+            <a:fontRef idx="minor">
+              <a:schemeClr val="lt1"/>
+            </a:fontRef>
+          </p:style>
+          <p:txBody>
+            <a:bodyPr rot="0" spcFirstLastPara="0" vertOverflow="overflow" horzOverflow="overflow" vert="horz" wrap="square" lIns="91440" tIns="45720" rIns="91440" bIns="45720" numCol="1" spcCol="0" rtlCol="0" fromWordArt="0" anchor="ctr" anchorCtr="0" forceAA="0" compatLnSpc="1">
+              <a:prstTxWarp prst="textNoShape">
+                <a:avLst/>
+              </a:prstTxWarp>
+              <a:noAutofit/>
+            </a:bodyPr>
+            <a:lstStyle/>
+            <a:p>
+              <a:pPr algn="ctr"/>
+              <a:endParaRPr lang="en-US"/>
+            </a:p>
+          </p:txBody>
+        </p:sp>
+      </p:grpSp>
+      <p:sp>
+        <p:nvSpPr>
+          <p:cNvPr id="23" name="Oval 22">
+            <a:extLst>
+              <a:ext uri="{FF2B5EF4-FFF2-40B4-BE49-F238E27FC236}">
+                <a16:creationId xmlns:a16="http://schemas.microsoft.com/office/drawing/2014/main" id="{D166A8AB-8924-421C-BCED-B54DBC4054E0}"/>
+              </a:ext>
+              <a:ext uri="{C183D7F6-B498-43B3-948B-1728B52AA6E4}">
+                <adec:decorative xmlns:adec="http://schemas.microsoft.com/office/drawing/2017/decorative" val="1"/>
+              </a:ext>
+            </a:extLst>
+          </p:cNvPr>
+          <p:cNvSpPr>
+            <a:spLocks noGrp="1" noRot="1" noChangeAspect="1" noMove="1" noResize="1" noEditPoints="1" noAdjustHandles="1" noChangeArrowheads="1" noChangeShapeType="1" noTextEdit="1"/>
+          </p:cNvSpPr>
+          <p:nvPr>
+            <p:extLst>
+              <p:ext uri="{386F3935-93C4-4BCD-93E2-E3B085C9AB24}">
+                <p16:designElem xmlns:p16="http://schemas.microsoft.com/office/powerpoint/2015/main" val="1"/>
+              </p:ext>
+            </p:extLst>
+          </p:nvPr>
+        </p:nvSpPr>
+        <p:spPr>
+          <a:xfrm>
+            <a:off x="2677897" y="5497189"/>
+            <a:ext cx="360000" cy="360000"/>
+          </a:xfrm>
+          <a:prstGeom prst="ellipse">
+            <a:avLst/>
+          </a:prstGeom>
+          <a:gradFill flip="none" rotWithShape="1">
+            <a:gsLst>
+              <a:gs pos="100000">
+                <a:schemeClr val="bg2">
+                  <a:lumMod val="50000"/>
+                  <a:lumOff val="50000"/>
+                </a:schemeClr>
+              </a:gs>
+              <a:gs pos="60000">
+                <a:schemeClr val="bg2"/>
+              </a:gs>
+            </a:gsLst>
+            <a:path path="circle">
+              <a:fillToRect l="100000" b="100000"/>
+            </a:path>
+            <a:tileRect t="-100000" r="-100000"/>
+          </a:gradFill>
+          <a:ln>
+            <a:noFill/>
+          </a:ln>
+          <a:effectLst>
+            <a:innerShdw blurRad="127000" dist="63500" dir="2700000">
+              <a:schemeClr val="accent1">
+                <a:lumMod val="60000"/>
+                <a:lumOff val="40000"/>
+                <a:alpha val="20000"/>
+              </a:schemeClr>
+            </a:innerShdw>
+            <a:softEdge rad="0"/>
+          </a:effectLst>
+        </p:spPr>
+        <p:style>
+          <a:lnRef idx="2">
+            <a:schemeClr val="accent1">
+              <a:shade val="50000"/>
+            </a:schemeClr>
+          </a:lnRef>
+          <a:fillRef idx="1">
+            <a:schemeClr val="accent1"/>
+          </a:fillRef>
+          <a:effectRef idx="0">
+            <a:schemeClr val="accent1"/>
+          </a:effectRef>
+          <a:fontRef idx="minor">
+            <a:schemeClr val="lt1"/>
+          </a:fontRef>
+        </p:style>
+        <p:txBody>
+          <a:bodyPr rot="0" spcFirstLastPara="0" vertOverflow="overflow" horzOverflow="overflow" vert="horz" wrap="square" lIns="91440" tIns="45720" rIns="91440" bIns="45720" numCol="1" spcCol="0" rtlCol="0" fromWordArt="0" anchor="ctr" anchorCtr="0" forceAA="0" compatLnSpc="1">
+            <a:prstTxWarp prst="textNoShape">
+              <a:avLst/>
+            </a:prstTxWarp>
+            <a:noAutofit/>
+          </a:bodyPr>
+          <a:lstStyle/>
+          <a:p>
+            <a:pPr algn="ctr"/>
+            <a:endParaRPr lang="en-US"/>
           </a:p>
         </p:txBody>
       </p:sp>
@@ -15598,44 +16773,156 @@
             <p:ph sz="quarter" idx="13"/>
           </p:nvPr>
         </p:nvSpPr>
-        <p:spPr/>
+        <p:spPr>
+          <a:xfrm>
+            <a:off x="550863" y="2677306"/>
+            <a:ext cx="3565525" cy="3415519"/>
+          </a:xfrm>
+        </p:spPr>
         <p:txBody>
-          <a:bodyPr>
+          <a:bodyPr vert="horz" wrap="square" lIns="0" tIns="0" rIns="0" bIns="0" rtlCol="0" anchor="t">
             <a:normAutofit/>
           </a:bodyPr>
           <a:lstStyle/>
           <a:p>
+            <a:pPr indent="-228600">
+              <a:buFont typeface="Arial" panose="020B0604020202020204" pitchFamily="34" charset="0"/>
+              <a:buChar char="•"/>
+            </a:pPr>
             <a:r>
-              <a:rPr lang="en-US" dirty="0"/>
+              <a:rPr lang="en-US" sz="1600">
+                <a:solidFill>
+                  <a:schemeClr val="tx1">
+                    <a:alpha val="60000"/>
+                  </a:schemeClr>
+                </a:solidFill>
+              </a:rPr>
               <a:t>Introduction</a:t>
             </a:r>
           </a:p>
           <a:p>
+            <a:pPr indent="-228600">
+              <a:buFont typeface="Arial" panose="020B0604020202020204" pitchFamily="34" charset="0"/>
+              <a:buChar char="•"/>
+            </a:pPr>
             <a:r>
-              <a:rPr lang="en-US" dirty="0"/>
+              <a:rPr lang="en-US" sz="1600">
+                <a:solidFill>
+                  <a:schemeClr val="tx1">
+                    <a:alpha val="60000"/>
+                  </a:schemeClr>
+                </a:solidFill>
+              </a:rPr>
               <a:t>Growth</a:t>
             </a:r>
           </a:p>
           <a:p>
+            <a:pPr indent="-228600">
+              <a:buFont typeface="Arial" panose="020B0604020202020204" pitchFamily="34" charset="0"/>
+              <a:buChar char="•"/>
+            </a:pPr>
             <a:r>
-              <a:rPr lang="en-US" dirty="0"/>
+              <a:rPr lang="en-US" sz="1600">
+                <a:solidFill>
+                  <a:schemeClr val="tx1">
+                    <a:alpha val="60000"/>
+                  </a:schemeClr>
+                </a:solidFill>
+              </a:rPr>
               <a:t>Sales &amp; Trends</a:t>
             </a:r>
           </a:p>
           <a:p>
+            <a:pPr indent="-228600">
+              <a:buFont typeface="Arial" panose="020B0604020202020204" pitchFamily="34" charset="0"/>
+              <a:buChar char="•"/>
+            </a:pPr>
             <a:r>
-              <a:rPr lang="en-US" dirty="0"/>
+              <a:rPr lang="en-US" sz="1600">
+                <a:solidFill>
+                  <a:schemeClr val="tx1">
+                    <a:alpha val="60000"/>
+                  </a:schemeClr>
+                </a:solidFill>
+              </a:rPr>
               <a:t>Performance</a:t>
             </a:r>
           </a:p>
           <a:p>
+            <a:pPr indent="-228600">
+              <a:buFont typeface="Arial" panose="020B0604020202020204" pitchFamily="34" charset="0"/>
+              <a:buChar char="•"/>
+            </a:pPr>
             <a:r>
-              <a:rPr lang="en-US" dirty="0"/>
+              <a:rPr lang="en-US" sz="1600">
+                <a:solidFill>
+                  <a:schemeClr val="tx1">
+                    <a:alpha val="60000"/>
+                  </a:schemeClr>
+                </a:solidFill>
+              </a:rPr>
               <a:t>Final tips &amp; takeaways</a:t>
             </a:r>
           </a:p>
         </p:txBody>
       </p:sp>
+      <p:pic>
+        <p:nvPicPr>
+          <p:cNvPr id="5" name="Picture 4">
+            <a:extLst>
+              <a:ext uri="{FF2B5EF4-FFF2-40B4-BE49-F238E27FC236}">
+                <a16:creationId xmlns:a16="http://schemas.microsoft.com/office/drawing/2014/main" id="{B0220446-5504-4A10-2A50-9F2E97DC0D9D}"/>
+              </a:ext>
+            </a:extLst>
+          </p:cNvPr>
+          <p:cNvPicPr>
+            <a:picLocks noChangeAspect="1"/>
+          </p:cNvPicPr>
+          <p:nvPr/>
+        </p:nvPicPr>
+        <p:blipFill>
+          <a:blip r:embed="rId3">
+            <a:extLst>
+              <a:ext uri="{28A0092B-C50C-407E-A947-70E740481C1C}">
+                <a14:useLocalDpi xmlns:a14="http://schemas.microsoft.com/office/drawing/2010/main" val="0"/>
+              </a:ext>
+            </a:extLst>
+          </a:blip>
+          <a:stretch>
+            <a:fillRect/>
+          </a:stretch>
+        </p:blipFill>
+        <p:spPr>
+          <a:xfrm>
+            <a:off x="3785309" y="1912131"/>
+            <a:ext cx="7855827" cy="3258962"/>
+          </a:xfrm>
+          <a:custGeom>
+            <a:avLst/>
+            <a:gdLst/>
+            <a:ahLst/>
+            <a:cxnLst/>
+            <a:rect l="l" t="t" r="r" b="b"/>
+            <a:pathLst>
+              <a:path w="7090237" h="5759451">
+                <a:moveTo>
+                  <a:pt x="0" y="0"/>
+                </a:moveTo>
+                <a:lnTo>
+                  <a:pt x="7090237" y="0"/>
+                </a:lnTo>
+                <a:lnTo>
+                  <a:pt x="7090237" y="5759451"/>
+                </a:lnTo>
+                <a:lnTo>
+                  <a:pt x="0" y="5759451"/>
+                </a:lnTo>
+                <a:close/>
+              </a:path>
+            </a:pathLst>
+          </a:custGeom>
+        </p:spPr>
+      </p:pic>
     </p:spTree>
     <p:extLst>
       <p:ext uri="{BB962C8B-B14F-4D97-AF65-F5344CB8AC3E}">
@@ -15671,7 +16958,7 @@
           <p:cNvPr id="2" name="Title 1">
             <a:extLst>
               <a:ext uri="{FF2B5EF4-FFF2-40B4-BE49-F238E27FC236}">
-                <a16:creationId xmlns:a16="http://schemas.microsoft.com/office/drawing/2014/main" id="{1C72343A-9CB0-F2AD-EF62-5DEE3E97F956}"/>
+                <a16:creationId xmlns:a16="http://schemas.microsoft.com/office/drawing/2014/main" id="{82F161D2-D88C-403C-01B0-2CADCF9C734C}"/>
               </a:ext>
             </a:extLst>
           </p:cNvPr>
@@ -15682,68 +16969,142 @@
             <p:ph type="title"/>
           </p:nvPr>
         </p:nvSpPr>
-        <p:spPr/>
+        <p:spPr>
+          <a:xfrm>
+            <a:off x="221064" y="329033"/>
+            <a:ext cx="11090275" cy="992326"/>
+          </a:xfrm>
+        </p:spPr>
         <p:txBody>
           <a:bodyPr/>
           <a:lstStyle/>
           <a:p>
             <a:r>
               <a:rPr lang="en-US" dirty="0"/>
-              <a:t>Growth</a:t>
+              <a:t>Total West Region Sales</a:t>
             </a:r>
           </a:p>
         </p:txBody>
       </p:sp>
-      <p:sp>
-        <p:nvSpPr>
-          <p:cNvPr id="3" name="Content Placeholder 2">
+      <p:pic>
+        <p:nvPicPr>
+          <p:cNvPr id="5" name="Content Placeholder 4">
             <a:extLst>
               <a:ext uri="{FF2B5EF4-FFF2-40B4-BE49-F238E27FC236}">
-                <a16:creationId xmlns:a16="http://schemas.microsoft.com/office/drawing/2014/main" id="{1C6744DD-5BC8-42C8-4313-13CE95ED575B}"/>
+                <a16:creationId xmlns:a16="http://schemas.microsoft.com/office/drawing/2014/main" id="{D9122433-5FE5-F772-D8C1-7D05464C8F00}"/>
               </a:ext>
             </a:extLst>
           </p:cNvPr>
-          <p:cNvSpPr>
-            <a:spLocks noGrp="1"/>
-          </p:cNvSpPr>
+          <p:cNvPicPr>
+            <a:picLocks noGrp="1" noChangeAspect="1"/>
+          </p:cNvPicPr>
           <p:nvPr>
-            <p:ph idx="1"/>
+            <p:ph sz="quarter" idx="13"/>
           </p:nvPr>
+        </p:nvPicPr>
+        <p:blipFill>
+          <a:blip r:embed="rId2">
+            <a:extLst>
+              <a:ext uri="{28A0092B-C50C-407E-A947-70E740481C1C}">
+                <a14:useLocalDpi xmlns:a14="http://schemas.microsoft.com/office/drawing/2010/main" val="0"/>
+              </a:ext>
+            </a:extLst>
+          </a:blip>
+          <a:srcRect l="33813" t="26639" r="17079" b="27785"/>
+          <a:stretch>
+            <a:fillRect/>
+          </a:stretch>
+        </p:blipFill>
+        <p:spPr>
+          <a:xfrm>
+            <a:off x="0" y="1627832"/>
+            <a:ext cx="6664431" cy="3285811"/>
+          </a:xfrm>
+          <a:prstGeom prst="rect">
+            <a:avLst/>
+          </a:prstGeom>
+        </p:spPr>
+      </p:pic>
+      <p:sp>
+        <p:nvSpPr>
+          <p:cNvPr id="6" name="TextBox 5">
+            <a:extLst>
+              <a:ext uri="{FF2B5EF4-FFF2-40B4-BE49-F238E27FC236}">
+                <a16:creationId xmlns:a16="http://schemas.microsoft.com/office/drawing/2014/main" id="{CFC8F17E-37CD-90AF-63B2-0D49A6EE89F8}"/>
+              </a:ext>
+            </a:extLst>
+          </p:cNvPr>
+          <p:cNvSpPr txBox="1"/>
+          <p:nvPr/>
         </p:nvSpPr>
-        <p:spPr/>
+        <p:spPr>
+          <a:xfrm>
+            <a:off x="6845628" y="1767006"/>
+            <a:ext cx="5061236" cy="3323987"/>
+          </a:xfrm>
+          <a:prstGeom prst="rect">
+            <a:avLst/>
+          </a:prstGeom>
+          <a:noFill/>
+        </p:spPr>
         <p:txBody>
-          <a:bodyPr/>
+          <a:bodyPr wrap="square" rtlCol="0">
+            <a:spAutoFit/>
+          </a:bodyPr>
           <a:lstStyle/>
           <a:p>
+            <a:pPr>
+              <a:lnSpc>
+                <a:spcPct val="200000"/>
+              </a:lnSpc>
+            </a:pPr>
             <a:r>
-              <a:rPr lang="en-US" dirty="0"/>
-              <a:t>Make eye contact with your audience to create a sense of intimacy and involvement</a:t>
+              <a:rPr lang="en-US" sz="2400" b="1" dirty="0"/>
+              <a:t>Region:  West</a:t>
             </a:r>
           </a:p>
           <a:p>
+            <a:pPr>
+              <a:lnSpc>
+                <a:spcPct val="200000"/>
+              </a:lnSpc>
+            </a:pPr>
             <a:r>
-              <a:rPr lang="en-US" dirty="0"/>
-              <a:t>Weave relatable stories into your presentation using narratives that make your message memorable and impactful</a:t>
+              <a:rPr lang="en-US" sz="2400" b="1" dirty="0"/>
+              <a:t>State: Colorado &amp; Online Sales</a:t>
             </a:r>
           </a:p>
           <a:p>
+            <a:pPr>
+              <a:lnSpc>
+                <a:spcPct val="200000"/>
+              </a:lnSpc>
+            </a:pPr>
             <a:r>
-              <a:rPr lang="en-US" dirty="0"/>
-              <a:t>Encourage questions and provide thoughtful responses to enhance audience participation</a:t>
+              <a:rPr lang="en-US" sz="2400" b="1" dirty="0"/>
+              <a:t>In-Store Sales: $6.41M</a:t>
             </a:r>
           </a:p>
           <a:p>
+            <a:pPr>
+              <a:lnSpc>
+                <a:spcPct val="200000"/>
+              </a:lnSpc>
+            </a:pPr>
             <a:r>
-              <a:rPr lang="en-US" dirty="0"/>
-              <a:t>Use live polls or surveys to gather audience opinions, promoting engagement and making sure the audience feel involved</a:t>
+              <a:rPr lang="en-US" sz="2400" b="1" dirty="0"/>
+              <a:t>Online Sales: $2.6M</a:t>
             </a:r>
+          </a:p>
+          <a:p>
+            <a:endParaRPr lang="en-US" dirty="0"/>
           </a:p>
         </p:txBody>
       </p:sp>
     </p:spTree>
     <p:extLst>
       <p:ext uri="{BB962C8B-B14F-4D97-AF65-F5344CB8AC3E}">
-        <p14:creationId xmlns:p14="http://schemas.microsoft.com/office/powerpoint/2010/main" val="652841706"/>
+        <p14:creationId xmlns:p14="http://schemas.microsoft.com/office/powerpoint/2010/main" val="3606723506"/>
       </p:ext>
     </p:extLst>
   </p:cSld>
@@ -15772,10 +17133,10 @@
       </p:grpSpPr>
       <p:sp>
         <p:nvSpPr>
-          <p:cNvPr id="3" name="Title 2">
+          <p:cNvPr id="2" name="Title 1">
             <a:extLst>
               <a:ext uri="{FF2B5EF4-FFF2-40B4-BE49-F238E27FC236}">
-                <a16:creationId xmlns:a16="http://schemas.microsoft.com/office/drawing/2014/main" id="{476CC09F-7383-3A4C-555C-35DA0BB4B76E}"/>
+                <a16:creationId xmlns:a16="http://schemas.microsoft.com/office/drawing/2014/main" id="{1C72343A-9CB0-F2AD-EF62-5DEE3E97F956}"/>
               </a:ext>
             </a:extLst>
           </p:cNvPr>
@@ -15786,77 +17147,138 @@
             <p:ph type="title"/>
           </p:nvPr>
         </p:nvSpPr>
-        <p:spPr/>
-        <p:txBody>
-          <a:bodyPr/>
-          <a:lstStyle/>
-          <a:p>
-            <a:r>
-              <a:rPr lang="en-US" dirty="0"/>
-              <a:t>Sales &amp; Trends</a:t>
-            </a:r>
-          </a:p>
-        </p:txBody>
-      </p:sp>
-      <p:sp>
-        <p:nvSpPr>
-          <p:cNvPr id="6" name="Content Placeholder 5">
-            <a:extLst>
-              <a:ext uri="{FF2B5EF4-FFF2-40B4-BE49-F238E27FC236}">
-                <a16:creationId xmlns:a16="http://schemas.microsoft.com/office/drawing/2014/main" id="{9BE7E655-DBBE-1E38-D543-EB34028F2F2B}"/>
-              </a:ext>
-            </a:extLst>
-          </p:cNvPr>
-          <p:cNvSpPr>
-            <a:spLocks noGrp="1"/>
-          </p:cNvSpPr>
-          <p:nvPr>
-            <p:ph sz="half" idx="1"/>
-          </p:nvPr>
-        </p:nvSpPr>
-        <p:spPr/>
-        <p:txBody>
-          <a:bodyPr/>
-          <a:lstStyle/>
-          <a:p>
-            <a:endParaRPr lang="en-US" dirty="0"/>
-          </a:p>
-        </p:txBody>
-      </p:sp>
-      <p:sp>
-        <p:nvSpPr>
-          <p:cNvPr id="7" name="Content Placeholder 6">
-            <a:extLst>
-              <a:ext uri="{FF2B5EF4-FFF2-40B4-BE49-F238E27FC236}">
-                <a16:creationId xmlns:a16="http://schemas.microsoft.com/office/drawing/2014/main" id="{845A03A5-6D4D-7072-B3BD-F2DA38CADEB0}"/>
-              </a:ext>
-            </a:extLst>
-          </p:cNvPr>
-          <p:cNvSpPr>
-            <a:spLocks noGrp="1"/>
-          </p:cNvSpPr>
-          <p:nvPr>
-            <p:ph sz="half" idx="13"/>
-          </p:nvPr>
-        </p:nvSpPr>
         <p:spPr>
           <a:xfrm>
-            <a:off x="6392353" y="2097175"/>
-            <a:ext cx="5435600" cy="3995650"/>
+            <a:off x="580359" y="488642"/>
+            <a:ext cx="7960421" cy="1450217"/>
           </a:xfrm>
         </p:spPr>
         <p:txBody>
           <a:bodyPr/>
           <a:lstStyle/>
           <a:p>
-            <a:endParaRPr lang="en-US" dirty="0"/>
+            <a:r>
+              <a:rPr lang="en-US" dirty="0"/>
+              <a:t>Growth</a:t>
+            </a:r>
+          </a:p>
+        </p:txBody>
+      </p:sp>
+      <p:pic>
+        <p:nvPicPr>
+          <p:cNvPr id="5" name="Content Placeholder 4">
+            <a:extLst>
+              <a:ext uri="{FF2B5EF4-FFF2-40B4-BE49-F238E27FC236}">
+                <a16:creationId xmlns:a16="http://schemas.microsoft.com/office/drawing/2014/main" id="{D4C16CE5-B2CD-4CB8-1F3C-CD9E1F48D498}"/>
+              </a:ext>
+            </a:extLst>
+          </p:cNvPr>
+          <p:cNvPicPr>
+            <a:picLocks noGrp="1" noChangeAspect="1"/>
+          </p:cNvPicPr>
+          <p:nvPr>
+            <p:ph idx="1"/>
+          </p:nvPr>
+        </p:nvPicPr>
+        <p:blipFill>
+          <a:blip r:embed="rId3">
+            <a:extLst>
+              <a:ext uri="{28A0092B-C50C-407E-A947-70E740481C1C}">
+                <a14:useLocalDpi xmlns:a14="http://schemas.microsoft.com/office/drawing/2010/main" val="0"/>
+              </a:ext>
+            </a:extLst>
+          </a:blip>
+          <a:srcRect l="44366" t="46879" r="16946" b="11463"/>
+          <a:stretch>
+            <a:fillRect/>
+          </a:stretch>
+        </p:blipFill>
+        <p:spPr>
+          <a:xfrm>
+            <a:off x="162925" y="1423956"/>
+            <a:ext cx="5805197" cy="3267356"/>
+          </a:xfrm>
+          <a:prstGeom prst="rect">
+            <a:avLst/>
+          </a:prstGeom>
+        </p:spPr>
+      </p:pic>
+      <p:pic>
+        <p:nvPicPr>
+          <p:cNvPr id="7" name="Picture 6">
+            <a:extLst>
+              <a:ext uri="{FF2B5EF4-FFF2-40B4-BE49-F238E27FC236}">
+                <a16:creationId xmlns:a16="http://schemas.microsoft.com/office/drawing/2014/main" id="{76F440CB-9C7F-C08E-019E-4249293A69E3}"/>
+              </a:ext>
+            </a:extLst>
+          </p:cNvPr>
+          <p:cNvPicPr>
+            <a:picLocks noChangeAspect="1"/>
+          </p:cNvPicPr>
+          <p:nvPr/>
+        </p:nvPicPr>
+        <p:blipFill>
+          <a:blip r:embed="rId3">
+            <a:extLst>
+              <a:ext uri="{28A0092B-C50C-407E-A947-70E740481C1C}">
+                <a14:useLocalDpi xmlns:a14="http://schemas.microsoft.com/office/drawing/2010/main" val="0"/>
+              </a:ext>
+            </a:extLst>
+          </a:blip>
+          <a:srcRect l="2719" t="47635" r="56320" b="12185"/>
+          <a:stretch>
+            <a:fillRect/>
+          </a:stretch>
+        </p:blipFill>
+        <p:spPr>
+          <a:xfrm>
+            <a:off x="6096000" y="3057634"/>
+            <a:ext cx="5805197" cy="3025245"/>
+          </a:xfrm>
+          <a:prstGeom prst="rect">
+            <a:avLst/>
+          </a:prstGeom>
+        </p:spPr>
+      </p:pic>
+      <p:sp>
+        <p:nvSpPr>
+          <p:cNvPr id="9" name="TextBox 8">
+            <a:extLst>
+              <a:ext uri="{FF2B5EF4-FFF2-40B4-BE49-F238E27FC236}">
+                <a16:creationId xmlns:a16="http://schemas.microsoft.com/office/drawing/2014/main" id="{2982DD72-C254-304D-5051-7CE557D0BE2D}"/>
+              </a:ext>
+            </a:extLst>
+          </p:cNvPr>
+          <p:cNvSpPr txBox="1"/>
+          <p:nvPr/>
+        </p:nvSpPr>
+        <p:spPr>
+          <a:xfrm>
+            <a:off x="6096000" y="1514592"/>
+            <a:ext cx="4768645" cy="1200329"/>
+          </a:xfrm>
+          <a:prstGeom prst="rect">
+            <a:avLst/>
+          </a:prstGeom>
+          <a:noFill/>
+        </p:spPr>
+        <p:txBody>
+          <a:bodyPr wrap="square" rtlCol="0">
+            <a:spAutoFit/>
+          </a:bodyPr>
+          <a:lstStyle/>
+          <a:p>
+            <a:r>
+              <a:rPr lang="en-US" dirty="0"/>
+              <a:t>For the past few years, the categories that have been dominating the west region are technologies &amp; accessories, with textbooks coming in second by a huge gap. </a:t>
+            </a:r>
           </a:p>
         </p:txBody>
       </p:sp>
     </p:spTree>
     <p:extLst>
       <p:ext uri="{BB962C8B-B14F-4D97-AF65-F5344CB8AC3E}">
-        <p14:creationId xmlns:p14="http://schemas.microsoft.com/office/powerpoint/2010/main" val="233018862"/>
+        <p14:creationId xmlns:p14="http://schemas.microsoft.com/office/powerpoint/2010/main" val="652841706"/>
       </p:ext>
     </p:extLst>
   </p:cSld>
@@ -15899,6 +17321,219 @@
             <p:ph type="title"/>
           </p:nvPr>
         </p:nvSpPr>
+        <p:spPr>
+          <a:xfrm>
+            <a:off x="440332" y="187088"/>
+            <a:ext cx="11090274" cy="1332000"/>
+          </a:xfrm>
+        </p:spPr>
+        <p:txBody>
+          <a:bodyPr/>
+          <a:lstStyle/>
+          <a:p>
+            <a:pPr algn="ctr"/>
+            <a:r>
+              <a:rPr lang="en-US" dirty="0"/>
+              <a:t>Sales &amp; Trends</a:t>
+            </a:r>
+          </a:p>
+        </p:txBody>
+      </p:sp>
+      <p:pic>
+        <p:nvPicPr>
+          <p:cNvPr id="10" name="Content Placeholder 9">
+            <a:extLst>
+              <a:ext uri="{FF2B5EF4-FFF2-40B4-BE49-F238E27FC236}">
+                <a16:creationId xmlns:a16="http://schemas.microsoft.com/office/drawing/2014/main" id="{87DB1954-AFA3-D196-2F99-76DC0EB77FE2}"/>
+              </a:ext>
+            </a:extLst>
+          </p:cNvPr>
+          <p:cNvPicPr>
+            <a:picLocks noGrp="1" noChangeAspect="1"/>
+          </p:cNvPicPr>
+          <p:nvPr>
+            <p:ph sz="half" idx="1"/>
+          </p:nvPr>
+        </p:nvPicPr>
+        <p:blipFill>
+          <a:blip r:embed="rId3">
+            <a:extLst>
+              <a:ext uri="{28A0092B-C50C-407E-A947-70E740481C1C}">
+                <a14:useLocalDpi xmlns:a14="http://schemas.microsoft.com/office/drawing/2010/main" val="0"/>
+              </a:ext>
+            </a:extLst>
+          </a:blip>
+          <a:srcRect l="3360" t="26938" r="42106" b="26935"/>
+          <a:stretch>
+            <a:fillRect/>
+          </a:stretch>
+        </p:blipFill>
+        <p:spPr>
+          <a:xfrm>
+            <a:off x="161954" y="1332683"/>
+            <a:ext cx="5823515" cy="3449515"/>
+          </a:xfrm>
+          <a:prstGeom prst="rect">
+            <a:avLst/>
+          </a:prstGeom>
+        </p:spPr>
+      </p:pic>
+      <p:pic>
+        <p:nvPicPr>
+          <p:cNvPr id="12" name="Content Placeholder 11">
+            <a:extLst>
+              <a:ext uri="{FF2B5EF4-FFF2-40B4-BE49-F238E27FC236}">
+                <a16:creationId xmlns:a16="http://schemas.microsoft.com/office/drawing/2014/main" id="{BCD2E638-D840-5CF4-B16A-2B8F41A8215E}"/>
+              </a:ext>
+            </a:extLst>
+          </p:cNvPr>
+          <p:cNvPicPr>
+            <a:picLocks noGrp="1" noChangeAspect="1"/>
+          </p:cNvPicPr>
+          <p:nvPr>
+            <p:ph sz="half" idx="13"/>
+          </p:nvPr>
+        </p:nvPicPr>
+        <p:blipFill>
+          <a:blip r:embed="rId4">
+            <a:extLst>
+              <a:ext uri="{28A0092B-C50C-407E-A947-70E740481C1C}">
+                <a14:useLocalDpi xmlns:a14="http://schemas.microsoft.com/office/drawing/2010/main" val="0"/>
+              </a:ext>
+            </a:extLst>
+          </a:blip>
+          <a:srcRect l="3289" t="26938" r="41622" b="24432"/>
+          <a:stretch>
+            <a:fillRect/>
+          </a:stretch>
+        </p:blipFill>
+        <p:spPr>
+          <a:xfrm>
+            <a:off x="6096000" y="2982078"/>
+            <a:ext cx="6095999" cy="3600240"/>
+          </a:xfrm>
+          <a:prstGeom prst="rect">
+            <a:avLst/>
+          </a:prstGeom>
+        </p:spPr>
+      </p:pic>
+      <p:sp>
+        <p:nvSpPr>
+          <p:cNvPr id="13" name="TextBox 12">
+            <a:extLst>
+              <a:ext uri="{FF2B5EF4-FFF2-40B4-BE49-F238E27FC236}">
+                <a16:creationId xmlns:a16="http://schemas.microsoft.com/office/drawing/2014/main" id="{BD4131B9-4435-7FB6-513D-18B131DFA578}"/>
+              </a:ext>
+            </a:extLst>
+          </p:cNvPr>
+          <p:cNvSpPr txBox="1"/>
+          <p:nvPr/>
+        </p:nvSpPr>
+        <p:spPr>
+          <a:xfrm>
+            <a:off x="5909186" y="1332683"/>
+            <a:ext cx="5142271" cy="923330"/>
+          </a:xfrm>
+          <a:prstGeom prst="rect">
+            <a:avLst/>
+          </a:prstGeom>
+          <a:noFill/>
+        </p:spPr>
+        <p:txBody>
+          <a:bodyPr wrap="square" rtlCol="0">
+            <a:spAutoFit/>
+          </a:bodyPr>
+          <a:lstStyle/>
+          <a:p>
+            <a:r>
+              <a:rPr lang="en-US" dirty="0"/>
+              <a:t>Steadily moving ascending through the years. Our highest point was in October with 330k for in-store sales.</a:t>
+            </a:r>
+          </a:p>
+        </p:txBody>
+      </p:sp>
+      <p:sp>
+        <p:nvSpPr>
+          <p:cNvPr id="14" name="TextBox 13">
+            <a:extLst>
+              <a:ext uri="{FF2B5EF4-FFF2-40B4-BE49-F238E27FC236}">
+                <a16:creationId xmlns:a16="http://schemas.microsoft.com/office/drawing/2014/main" id="{AD809FDC-E3B8-8E49-968A-ADECE440776F}"/>
+              </a:ext>
+            </a:extLst>
+          </p:cNvPr>
+          <p:cNvSpPr txBox="1"/>
+          <p:nvPr/>
+        </p:nvSpPr>
+        <p:spPr>
+          <a:xfrm>
+            <a:off x="1179872" y="5466128"/>
+            <a:ext cx="4916128" cy="923330"/>
+          </a:xfrm>
+          <a:prstGeom prst="rect">
+            <a:avLst/>
+          </a:prstGeom>
+          <a:noFill/>
+        </p:spPr>
+        <p:txBody>
+          <a:bodyPr wrap="square" rtlCol="0">
+            <a:spAutoFit/>
+          </a:bodyPr>
+          <a:lstStyle/>
+          <a:p>
+            <a:pPr algn="r"/>
+            <a:r>
+              <a:rPr lang="en-US" dirty="0"/>
+              <a:t>As of December, sales seem to have dropped to 208k. We can make a few assumptions based on the weather and the seasonal time.</a:t>
+            </a:r>
+          </a:p>
+        </p:txBody>
+      </p:sp>
+    </p:spTree>
+    <p:extLst>
+      <p:ext uri="{BB962C8B-B14F-4D97-AF65-F5344CB8AC3E}">
+        <p14:creationId xmlns:p14="http://schemas.microsoft.com/office/powerpoint/2010/main" val="233018862"/>
+      </p:ext>
+    </p:extLst>
+  </p:cSld>
+  <p:clrMapOvr>
+    <a:masterClrMapping/>
+  </p:clrMapOvr>
+</p:sld>
+</file>
+
+<file path=ppt/slides/slide6.xml><?xml version="1.0" encoding="utf-8"?>
+<p:sld xmlns:a="http://schemas.openxmlformats.org/drawingml/2006/main" xmlns:r="http://schemas.openxmlformats.org/officeDocument/2006/relationships" xmlns:p="http://schemas.openxmlformats.org/presentationml/2006/main">
+  <p:cSld>
+    <p:spTree>
+      <p:nvGrpSpPr>
+        <p:cNvPr id="1" name=""/>
+        <p:cNvGrpSpPr/>
+        <p:nvPr/>
+      </p:nvGrpSpPr>
+      <p:grpSpPr>
+        <a:xfrm>
+          <a:off x="0" y="0"/>
+          <a:ext cx="0" cy="0"/>
+          <a:chOff x="0" y="0"/>
+          <a:chExt cx="0" cy="0"/>
+        </a:xfrm>
+      </p:grpSpPr>
+      <p:sp>
+        <p:nvSpPr>
+          <p:cNvPr id="3" name="Title 2">
+            <a:extLst>
+              <a:ext uri="{FF2B5EF4-FFF2-40B4-BE49-F238E27FC236}">
+                <a16:creationId xmlns:a16="http://schemas.microsoft.com/office/drawing/2014/main" id="{476CC09F-7383-3A4C-555C-35DA0BB4B76E}"/>
+              </a:ext>
+            </a:extLst>
+          </p:cNvPr>
+          <p:cNvSpPr>
+            <a:spLocks noGrp="1"/>
+          </p:cNvSpPr>
+          <p:nvPr>
+            <p:ph type="title"/>
+          </p:nvPr>
+        </p:nvSpPr>
         <p:spPr/>
         <p:txBody>
           <a:bodyPr/>
@@ -15927,38 +17562,102 @@
             <p:ph sz="half" idx="1"/>
           </p:nvPr>
         </p:nvSpPr>
-        <p:spPr/>
+        <p:spPr>
+          <a:xfrm>
+            <a:off x="550863" y="2254491"/>
+            <a:ext cx="5435600" cy="2986103"/>
+          </a:xfrm>
+        </p:spPr>
         <p:txBody>
           <a:bodyPr/>
           <a:lstStyle/>
           <a:p>
             <a:pPr lvl="1"/>
-            <a:endParaRPr lang="en-US" dirty="0"/>
+            <a:r>
+              <a:rPr lang="en-US" dirty="0"/>
+              <a:t> </a:t>
+            </a:r>
+            <a:r>
+              <a:rPr lang="en-US" sz="2400" dirty="0"/>
+              <a:t>Top-selling authors are:</a:t>
+            </a:r>
+          </a:p>
+          <a:p>
+            <a:pPr lvl="1"/>
+            <a:r>
+              <a:rPr lang="en-US" sz="2400" dirty="0"/>
+              <a:t>Suzanne Collins - $ 38,652.65</a:t>
+            </a:r>
+          </a:p>
+          <a:p>
+            <a:pPr lvl="1"/>
+            <a:r>
+              <a:rPr lang="en-US" sz="2400" dirty="0"/>
+              <a:t>Stephen Hawkings - $37,844.04</a:t>
+            </a:r>
+          </a:p>
+          <a:p>
+            <a:pPr lvl="1"/>
+            <a:r>
+              <a:rPr lang="en-US" sz="2400" dirty="0"/>
+              <a:t>J.K. Rowling - $31, 961.04</a:t>
+            </a:r>
           </a:p>
         </p:txBody>
       </p:sp>
       <p:sp>
         <p:nvSpPr>
-          <p:cNvPr id="7" name="Content Placeholder 6">
+          <p:cNvPr id="2" name="TextBox 1">
             <a:extLst>
               <a:ext uri="{FF2B5EF4-FFF2-40B4-BE49-F238E27FC236}">
-                <a16:creationId xmlns:a16="http://schemas.microsoft.com/office/drawing/2014/main" id="{845A03A5-6D4D-7072-B3BD-F2DA38CADEB0}"/>
+                <a16:creationId xmlns:a16="http://schemas.microsoft.com/office/drawing/2014/main" id="{E272CB83-809D-8681-D75B-3BCE20233C46}"/>
               </a:ext>
             </a:extLst>
           </p:cNvPr>
-          <p:cNvSpPr>
-            <a:spLocks noGrp="1"/>
-          </p:cNvSpPr>
-          <p:nvPr>
-            <p:ph sz="half" idx="13"/>
-          </p:nvPr>
+          <p:cNvSpPr txBox="1"/>
+          <p:nvPr/>
         </p:nvSpPr>
-        <p:spPr/>
+        <p:spPr>
+          <a:xfrm>
+            <a:off x="6096000" y="2254491"/>
+            <a:ext cx="4591665" cy="2554545"/>
+          </a:xfrm>
+          <a:prstGeom prst="rect">
+            <a:avLst/>
+          </a:prstGeom>
+          <a:noFill/>
+        </p:spPr>
         <p:txBody>
-          <a:bodyPr/>
+          <a:bodyPr wrap="square" rtlCol="0">
+            <a:spAutoFit/>
+          </a:bodyPr>
           <a:lstStyle/>
           <a:p>
-            <a:endParaRPr lang="en-US" dirty="0"/>
+            <a:pPr marL="285750" indent="-285750">
+              <a:buFont typeface="Arial" panose="020B0604020202020204" pitchFamily="34" charset="0"/>
+              <a:buChar char="•"/>
+            </a:pPr>
+            <a:r>
+              <a:rPr lang="en-US" sz="2000" dirty="0"/>
+              <a:t>We should focus our inventory mostly on books from these authors since they are producing the most sales within our stores. </a:t>
+            </a:r>
+          </a:p>
+          <a:p>
+            <a:pPr marL="285750" indent="-285750">
+              <a:buFont typeface="Arial" panose="020B0604020202020204" pitchFamily="34" charset="0"/>
+              <a:buChar char="•"/>
+            </a:pPr>
+            <a:endParaRPr lang="en-US" sz="2000" dirty="0"/>
+          </a:p>
+          <a:p>
+            <a:pPr marL="285750" indent="-285750">
+              <a:buFont typeface="Arial" panose="020B0604020202020204" pitchFamily="34" charset="0"/>
+              <a:buChar char="•"/>
+            </a:pPr>
+            <a:r>
+              <a:rPr lang="en-US" sz="2000" dirty="0"/>
+              <a:t>With that, our sales won’t rely mainly on the technology &amp; accessories, which is rather dangerous. </a:t>
+            </a:r>
           </a:p>
         </p:txBody>
       </p:sp>
@@ -15975,7 +17674,7 @@
 </p:sld>
 </file>
 
-<file path=ppt/slides/slide6.xml><?xml version="1.0" encoding="utf-8"?>
+<file path=ppt/slides/slide7.xml><?xml version="1.0" encoding="utf-8"?>
 <p:sld xmlns:a="http://schemas.openxmlformats.org/drawingml/2006/main" xmlns:r="http://schemas.openxmlformats.org/officeDocument/2006/relationships" xmlns:p="http://schemas.openxmlformats.org/presentationml/2006/main">
   <p:cSld>
     <p:spTree>
@@ -16471,6 +18170,10 @@
           </p:nvPr>
         </p:nvSpPr>
         <p:spPr>
+          <a:xfrm>
+            <a:off x="596634" y="0"/>
+            <a:ext cx="4899628" cy="2331490"/>
+          </a:xfrm>
           <a:noFill/>
         </p:spPr>
         <p:txBody>
@@ -16501,15 +18204,36 @@
           </p:nvPr>
         </p:nvSpPr>
         <p:spPr>
+          <a:xfrm>
+            <a:off x="578822" y="2331490"/>
+            <a:ext cx="4917440" cy="3442144"/>
+          </a:xfrm>
           <a:noFill/>
         </p:spPr>
         <p:txBody>
           <a:bodyPr vert="horz" lIns="91440" tIns="45720" rIns="91440" bIns="45720" rtlCol="0" anchor="t">
-            <a:normAutofit/>
+            <a:normAutofit lnSpcReduction="10000"/>
           </a:bodyPr>
           <a:lstStyle/>
           <a:p>
-            <a:endParaRPr lang="en-US" dirty="0"/>
+            <a:pPr marL="285750" indent="-285750" algn="l">
+              <a:buFont typeface="Wingdings" panose="05000000000000000000" pitchFamily="2" charset="2"/>
+              <a:buChar char="v"/>
+            </a:pPr>
+            <a:r>
+              <a:rPr lang="en-US" dirty="0"/>
+              <a:t>We can at most predict when certain sales may drop from certain products based on the time and season.  We should base our marketing on that. </a:t>
+            </a:r>
+          </a:p>
+          <a:p>
+            <a:pPr marL="285750" indent="-285750" algn="l">
+              <a:buFont typeface="Wingdings" panose="05000000000000000000" pitchFamily="2" charset="2"/>
+              <a:buChar char="v"/>
+            </a:pPr>
+            <a:r>
+              <a:rPr lang="en-US" dirty="0"/>
+              <a:t>Colorado stores experienced a 12% decline in Category textbook and books sales during the last year, while online sales for the same category remained stable. Management should consider targeted online promotions to help increase demand and offset declining in-store performance.</a:t>
+            </a:r>
           </a:p>
         </p:txBody>
       </p:sp>
@@ -16561,7 +18285,7 @@
         </p:nvSpPr>
         <p:spPr>
           <a:xfrm>
-            <a:off x="1189378" y="5232629"/>
+            <a:off x="52068" y="5778000"/>
             <a:ext cx="1080000" cy="1080000"/>
           </a:xfrm>
           <a:prstGeom prst="ellipse">
@@ -16643,9 +18367,17 @@
 </p:sld>
 </file>
 
-<file path=ppt/slides/slide7.xml><?xml version="1.0" encoding="utf-8"?>
+<file path=ppt/slides/slide8.xml><?xml version="1.0" encoding="utf-8"?>
 <p:sld xmlns:a="http://schemas.openxmlformats.org/drawingml/2006/main" xmlns:r="http://schemas.openxmlformats.org/officeDocument/2006/relationships" xmlns:p="http://schemas.openxmlformats.org/presentationml/2006/main">
   <p:cSld>
+    <p:bg>
+      <p:bgPr>
+        <a:solidFill>
+          <a:schemeClr val="bg2"/>
+        </a:solidFill>
+        <a:effectLst/>
+      </p:bgPr>
+    </p:bg>
     <p:spTree>
       <p:nvGrpSpPr>
         <p:cNvPr id="1" name=""/>
@@ -16660,6 +18392,1337 @@
           <a:chExt cx="0" cy="0"/>
         </a:xfrm>
       </p:grpSpPr>
+      <p:sp>
+        <p:nvSpPr>
+          <p:cNvPr id="10" name="Freeform: Shape 9">
+            <a:extLst>
+              <a:ext uri="{FF2B5EF4-FFF2-40B4-BE49-F238E27FC236}">
+                <a16:creationId xmlns:a16="http://schemas.microsoft.com/office/drawing/2014/main" id="{82184FF4-7029-4ED7-813A-192E60608764}"/>
+              </a:ext>
+              <a:ext uri="{C183D7F6-B498-43B3-948B-1728B52AA6E4}">
+                <adec:decorative xmlns:adec="http://schemas.microsoft.com/office/drawing/2017/decorative" val="1"/>
+              </a:ext>
+            </a:extLst>
+          </p:cNvPr>
+          <p:cNvSpPr>
+            <a:spLocks noGrp="1" noRot="1" noChangeAspect="1" noMove="1" noResize="1" noEditPoints="1" noAdjustHandles="1" noChangeArrowheads="1" noChangeShapeType="1" noTextEdit="1"/>
+          </p:cNvSpPr>
+          <p:nvPr>
+            <p:extLst>
+              <p:ext uri="{386F3935-93C4-4BCD-93E2-E3B085C9AB24}">
+                <p16:designElem xmlns:p16="http://schemas.microsoft.com/office/powerpoint/2015/main" val="1"/>
+              </p:ext>
+            </p:extLst>
+          </p:nvPr>
+        </p:nvSpPr>
+        <p:spPr>
+          <a:xfrm rot="2700000">
+            <a:off x="612445" y="481888"/>
+            <a:ext cx="1080000" cy="1262947"/>
+          </a:xfrm>
+          <a:custGeom>
+            <a:avLst/>
+            <a:gdLst/>
+            <a:ahLst/>
+            <a:cxnLst/>
+            <a:rect l="l" t="t" r="r" b="b"/>
+            <a:pathLst>
+              <a:path w="1080000" h="1262947">
+                <a:moveTo>
+                  <a:pt x="540000" y="0"/>
+                </a:moveTo>
+                <a:lnTo>
+                  <a:pt x="1064374" y="931034"/>
+                </a:lnTo>
+                <a:lnTo>
+                  <a:pt x="1069029" y="938533"/>
+                </a:lnTo>
+                <a:cubicBezTo>
+                  <a:pt x="1076223" y="956109"/>
+                  <a:pt x="1080000" y="974307"/>
+                  <a:pt x="1080000" y="992947"/>
+                </a:cubicBezTo>
+                <a:cubicBezTo>
+                  <a:pt x="1080000" y="1142064"/>
+                  <a:pt x="838234" y="1262947"/>
+                  <a:pt x="540000" y="1262947"/>
+                </a:cubicBezTo>
+                <a:cubicBezTo>
+                  <a:pt x="241766" y="1262947"/>
+                  <a:pt x="0" y="1142064"/>
+                  <a:pt x="0" y="992947"/>
+                </a:cubicBezTo>
+                <a:cubicBezTo>
+                  <a:pt x="0" y="974307"/>
+                  <a:pt x="3778" y="956109"/>
+                  <a:pt x="10971" y="938533"/>
+                </a:cubicBezTo>
+                <a:lnTo>
+                  <a:pt x="15626" y="931034"/>
+                </a:lnTo>
+                <a:lnTo>
+                  <a:pt x="540000" y="0"/>
+                </a:lnTo>
+                <a:close/>
+              </a:path>
+            </a:pathLst>
+          </a:custGeom>
+          <a:gradFill>
+            <a:gsLst>
+              <a:gs pos="60000">
+                <a:schemeClr val="bg2">
+                  <a:lumMod val="90000"/>
+                  <a:lumOff val="10000"/>
+                </a:schemeClr>
+              </a:gs>
+              <a:gs pos="30000">
+                <a:schemeClr val="bg2">
+                  <a:lumMod val="90000"/>
+                  <a:lumOff val="10000"/>
+                </a:schemeClr>
+              </a:gs>
+              <a:gs pos="40000">
+                <a:schemeClr val="bg2">
+                  <a:lumMod val="75000"/>
+                  <a:lumOff val="25000"/>
+                </a:schemeClr>
+              </a:gs>
+              <a:gs pos="100000">
+                <a:schemeClr val="bg2"/>
+              </a:gs>
+            </a:gsLst>
+            <a:lin ang="600000" scaled="0"/>
+          </a:gradFill>
+          <a:ln>
+            <a:noFill/>
+          </a:ln>
+          <a:effectLst>
+            <a:innerShdw blurRad="254000" dist="101600" dir="2700000">
+              <a:schemeClr val="accent1">
+                <a:lumMod val="60000"/>
+                <a:lumOff val="40000"/>
+                <a:alpha val="40000"/>
+              </a:schemeClr>
+            </a:innerShdw>
+          </a:effectLst>
+        </p:spPr>
+        <p:style>
+          <a:lnRef idx="2">
+            <a:schemeClr val="accent1">
+              <a:shade val="50000"/>
+            </a:schemeClr>
+          </a:lnRef>
+          <a:fillRef idx="1">
+            <a:schemeClr val="accent1"/>
+          </a:fillRef>
+          <a:effectRef idx="0">
+            <a:schemeClr val="accent1"/>
+          </a:effectRef>
+          <a:fontRef idx="minor">
+            <a:schemeClr val="lt1"/>
+          </a:fontRef>
+        </p:style>
+        <p:txBody>
+          <a:bodyPr rot="0" spcFirstLastPara="0" vertOverflow="overflow" horzOverflow="overflow" vert="horz" wrap="square" lIns="91440" tIns="45720" rIns="91440" bIns="45720" numCol="1" spcCol="0" rtlCol="0" fromWordArt="0" anchor="ctr" anchorCtr="0" forceAA="0" compatLnSpc="1">
+            <a:prstTxWarp prst="textNoShape">
+              <a:avLst/>
+            </a:prstTxWarp>
+            <a:noAutofit/>
+          </a:bodyPr>
+          <a:lstStyle/>
+          <a:p>
+            <a:pPr algn="ctr"/>
+            <a:endParaRPr lang="en-US"/>
+          </a:p>
+        </p:txBody>
+      </p:sp>
+      <p:sp>
+        <p:nvSpPr>
+          <p:cNvPr id="12" name="Oval 11">
+            <a:extLst>
+              <a:ext uri="{FF2B5EF4-FFF2-40B4-BE49-F238E27FC236}">
+                <a16:creationId xmlns:a16="http://schemas.microsoft.com/office/drawing/2014/main" id="{AAA7AB09-557C-41AD-9113-FF9F68FA1035}"/>
+              </a:ext>
+              <a:ext uri="{C183D7F6-B498-43B3-948B-1728B52AA6E4}">
+                <adec:decorative xmlns:adec="http://schemas.microsoft.com/office/drawing/2017/decorative" val="1"/>
+              </a:ext>
+            </a:extLst>
+          </p:cNvPr>
+          <p:cNvSpPr>
+            <a:spLocks noGrp="1" noRot="1" noChangeAspect="1" noMove="1" noResize="1" noEditPoints="1" noAdjustHandles="1" noChangeArrowheads="1" noChangeShapeType="1" noTextEdit="1"/>
+          </p:cNvSpPr>
+          <p:nvPr>
+            <p:extLst>
+              <p:ext uri="{386F3935-93C4-4BCD-93E2-E3B085C9AB24}">
+                <p16:designElem xmlns:p16="http://schemas.microsoft.com/office/powerpoint/2015/main" val="1"/>
+              </p:ext>
+            </p:extLst>
+          </p:nvPr>
+        </p:nvSpPr>
+        <p:spPr>
+          <a:xfrm rot="8100000">
+            <a:off x="626845" y="828962"/>
+            <a:ext cx="540000" cy="1080000"/>
+          </a:xfrm>
+          <a:prstGeom prst="ellipse">
+            <a:avLst/>
+          </a:prstGeom>
+          <a:gradFill>
+            <a:gsLst>
+              <a:gs pos="100000">
+                <a:schemeClr val="bg2">
+                  <a:lumMod val="90000"/>
+                  <a:lumOff val="10000"/>
+                </a:schemeClr>
+              </a:gs>
+              <a:gs pos="50000">
+                <a:schemeClr val="bg2">
+                  <a:lumMod val="95000"/>
+                  <a:lumOff val="5000"/>
+                </a:schemeClr>
+              </a:gs>
+            </a:gsLst>
+            <a:lin ang="5400000" scaled="0"/>
+          </a:gradFill>
+          <a:ln>
+            <a:noFill/>
+          </a:ln>
+          <a:effectLst>
+            <a:innerShdw blurRad="1270000" dist="2540000">
+              <a:schemeClr val="accent1">
+                <a:lumMod val="60000"/>
+                <a:lumOff val="40000"/>
+                <a:alpha val="0"/>
+              </a:schemeClr>
+            </a:innerShdw>
+          </a:effectLst>
+        </p:spPr>
+        <p:style>
+          <a:lnRef idx="2">
+            <a:schemeClr val="accent1">
+              <a:shade val="50000"/>
+            </a:schemeClr>
+          </a:lnRef>
+          <a:fillRef idx="1">
+            <a:schemeClr val="accent1"/>
+          </a:fillRef>
+          <a:effectRef idx="0">
+            <a:schemeClr val="accent1"/>
+          </a:effectRef>
+          <a:fontRef idx="minor">
+            <a:schemeClr val="lt1"/>
+          </a:fontRef>
+        </p:style>
+        <p:txBody>
+          <a:bodyPr rot="0" spcFirstLastPara="0" vertOverflow="overflow" horzOverflow="overflow" vert="horz" wrap="square" lIns="91440" tIns="45720" rIns="91440" bIns="45720" numCol="1" spcCol="0" rtlCol="0" fromWordArt="0" anchor="ctr" anchorCtr="0" forceAA="0" compatLnSpc="1">
+            <a:prstTxWarp prst="textNoShape">
+              <a:avLst/>
+            </a:prstTxWarp>
+            <a:noAutofit/>
+          </a:bodyPr>
+          <a:lstStyle/>
+          <a:p>
+            <a:pPr algn="ctr"/>
+            <a:endParaRPr lang="en-US"/>
+          </a:p>
+        </p:txBody>
+      </p:sp>
+      <p:sp>
+        <p:nvSpPr>
+          <p:cNvPr id="14" name="Oval 13">
+            <a:extLst>
+              <a:ext uri="{FF2B5EF4-FFF2-40B4-BE49-F238E27FC236}">
+                <a16:creationId xmlns:a16="http://schemas.microsoft.com/office/drawing/2014/main" id="{EF99ECAA-1F11-4937-BBA6-51935AB44C9D}"/>
+              </a:ext>
+              <a:ext uri="{C183D7F6-B498-43B3-948B-1728B52AA6E4}">
+                <adec:decorative xmlns:adec="http://schemas.microsoft.com/office/drawing/2017/decorative" val="1"/>
+              </a:ext>
+            </a:extLst>
+          </p:cNvPr>
+          <p:cNvSpPr>
+            <a:spLocks noGrp="1" noRot="1" noChangeAspect="1" noMove="1" noResize="1" noEditPoints="1" noAdjustHandles="1" noChangeArrowheads="1" noChangeShapeType="1" noTextEdit="1"/>
+          </p:cNvSpPr>
+          <p:nvPr>
+            <p:extLst>
+              <p:ext uri="{386F3935-93C4-4BCD-93E2-E3B085C9AB24}">
+                <p16:designElem xmlns:p16="http://schemas.microsoft.com/office/powerpoint/2015/main" val="1"/>
+              </p:ext>
+            </p:extLst>
+          </p:nvPr>
+        </p:nvSpPr>
+        <p:spPr>
+          <a:xfrm>
+            <a:off x="1800802" y="2472855"/>
+            <a:ext cx="360000" cy="360000"/>
+          </a:xfrm>
+          <a:prstGeom prst="ellipse">
+            <a:avLst/>
+          </a:prstGeom>
+          <a:gradFill flip="none" rotWithShape="1">
+            <a:gsLst>
+              <a:gs pos="100000">
+                <a:schemeClr val="bg2">
+                  <a:lumMod val="50000"/>
+                  <a:lumOff val="50000"/>
+                </a:schemeClr>
+              </a:gs>
+              <a:gs pos="60000">
+                <a:schemeClr val="bg2"/>
+              </a:gs>
+            </a:gsLst>
+            <a:path path="circle">
+              <a:fillToRect l="100000" b="100000"/>
+            </a:path>
+            <a:tileRect t="-100000" r="-100000"/>
+          </a:gradFill>
+          <a:ln>
+            <a:noFill/>
+          </a:ln>
+          <a:effectLst>
+            <a:innerShdw blurRad="127000" dist="63500" dir="2700000">
+              <a:schemeClr val="accent1">
+                <a:lumMod val="60000"/>
+                <a:lumOff val="40000"/>
+                <a:alpha val="20000"/>
+              </a:schemeClr>
+            </a:innerShdw>
+            <a:softEdge rad="0"/>
+          </a:effectLst>
+        </p:spPr>
+        <p:style>
+          <a:lnRef idx="2">
+            <a:schemeClr val="accent1">
+              <a:shade val="50000"/>
+            </a:schemeClr>
+          </a:lnRef>
+          <a:fillRef idx="1">
+            <a:schemeClr val="accent1"/>
+          </a:fillRef>
+          <a:effectRef idx="0">
+            <a:schemeClr val="accent1"/>
+          </a:effectRef>
+          <a:fontRef idx="minor">
+            <a:schemeClr val="lt1"/>
+          </a:fontRef>
+        </p:style>
+        <p:txBody>
+          <a:bodyPr rot="0" spcFirstLastPara="0" vertOverflow="overflow" horzOverflow="overflow" vert="horz" wrap="square" lIns="91440" tIns="45720" rIns="91440" bIns="45720" numCol="1" spcCol="0" rtlCol="0" fromWordArt="0" anchor="ctr" anchorCtr="0" forceAA="0" compatLnSpc="1">
+            <a:prstTxWarp prst="textNoShape">
+              <a:avLst/>
+            </a:prstTxWarp>
+            <a:noAutofit/>
+          </a:bodyPr>
+          <a:lstStyle/>
+          <a:p>
+            <a:pPr algn="ctr"/>
+            <a:endParaRPr lang="en-US"/>
+          </a:p>
+        </p:txBody>
+      </p:sp>
+      <p:grpSp>
+        <p:nvGrpSpPr>
+          <p:cNvPr id="16" name="Group 15">
+            <a:extLst>
+              <a:ext uri="{FF2B5EF4-FFF2-40B4-BE49-F238E27FC236}">
+                <a16:creationId xmlns:a16="http://schemas.microsoft.com/office/drawing/2014/main" id="{79DE9FAB-6BBA-4CFE-B67D-77B47F01ECA4}"/>
+              </a:ext>
+              <a:ext uri="{C183D7F6-B498-43B3-948B-1728B52AA6E4}">
+                <adec:decorative xmlns:adec="http://schemas.microsoft.com/office/drawing/2017/decorative" val="1"/>
+              </a:ext>
+            </a:extLst>
+          </p:cNvPr>
+          <p:cNvGrpSpPr>
+            <a:grpSpLocks noGrp="1" noUngrp="1" noRot="1" noChangeAspect="1" noMove="1" noResize="1"/>
+          </p:cNvGrpSpPr>
+          <p:nvPr>
+            <p:extLst>
+              <p:ext uri="{386F3935-93C4-4BCD-93E2-E3B085C9AB24}">
+                <p16:designElem xmlns:p16="http://schemas.microsoft.com/office/powerpoint/2015/main" val="1"/>
+              </p:ext>
+            </p:extLst>
+          </p:nvPr>
+        </p:nvGrpSpPr>
+        <p:grpSpPr>
+          <a:xfrm>
+            <a:off x="1329952" y="4524379"/>
+            <a:ext cx="1980001" cy="1363916"/>
+            <a:chOff x="4879602" y="3781429"/>
+            <a:chExt cx="1980001" cy="1363916"/>
+          </a:xfrm>
+        </p:grpSpPr>
+        <p:sp>
+          <p:nvSpPr>
+            <p:cNvPr id="17" name="Freeform: Shape 16">
+              <a:extLst>
+                <a:ext uri="{FF2B5EF4-FFF2-40B4-BE49-F238E27FC236}">
+                  <a16:creationId xmlns:a16="http://schemas.microsoft.com/office/drawing/2014/main" id="{79FAC916-D9BB-4794-81B4-7C47C67E850D}"/>
+                </a:ext>
+                <a:ext uri="{C183D7F6-B498-43B3-948B-1728B52AA6E4}">
+                  <adec:decorative xmlns:adec="http://schemas.microsoft.com/office/drawing/2017/decorative" val="1"/>
+                </a:ext>
+              </a:extLst>
+            </p:cNvPr>
+            <p:cNvSpPr>
+              <a:spLocks noChangeAspect="1"/>
+            </p:cNvSpPr>
+            <p:nvPr>
+              <p:extLst>
+                <p:ext uri="{386F3935-93C4-4BCD-93E2-E3B085C9AB24}">
+                  <p16:designElem xmlns:p16="http://schemas.microsoft.com/office/powerpoint/2015/main" val="1"/>
+                </p:ext>
+              </p:extLst>
+            </p:nvPr>
+          </p:nvSpPr>
+          <p:spPr>
+            <a:xfrm rot="18900000" flipV="1">
+              <a:off x="5005634" y="4191206"/>
+              <a:ext cx="1853969" cy="926985"/>
+            </a:xfrm>
+            <a:custGeom>
+              <a:avLst/>
+              <a:gdLst>
+                <a:gd name="connsiteX0" fmla="*/ 1329373 w 2658746"/>
+                <a:gd name="connsiteY0" fmla="*/ 0 h 1329373"/>
+                <a:gd name="connsiteX1" fmla="*/ 2658746 w 2658746"/>
+                <a:gd name="connsiteY1" fmla="*/ 1329373 h 1329373"/>
+                <a:gd name="connsiteX2" fmla="*/ 1994059 w 2658746"/>
+                <a:gd name="connsiteY2" fmla="*/ 1329373 h 1329373"/>
+                <a:gd name="connsiteX3" fmla="*/ 1329373 w 2658746"/>
+                <a:gd name="connsiteY3" fmla="*/ 664687 h 1329373"/>
+                <a:gd name="connsiteX4" fmla="*/ 664687 w 2658746"/>
+                <a:gd name="connsiteY4" fmla="*/ 1329373 h 1329373"/>
+                <a:gd name="connsiteX5" fmla="*/ 0 w 2658746"/>
+                <a:gd name="connsiteY5" fmla="*/ 1329373 h 1329373"/>
+                <a:gd name="connsiteX6" fmla="*/ 1329373 w 2658746"/>
+                <a:gd name="connsiteY6" fmla="*/ 0 h 1329373"/>
+              </a:gdLst>
+              <a:ahLst/>
+              <a:cxnLst>
+                <a:cxn ang="0">
+                  <a:pos x="connsiteX0" y="connsiteY0"/>
+                </a:cxn>
+                <a:cxn ang="0">
+                  <a:pos x="connsiteX1" y="connsiteY1"/>
+                </a:cxn>
+                <a:cxn ang="0">
+                  <a:pos x="connsiteX2" y="connsiteY2"/>
+                </a:cxn>
+                <a:cxn ang="0">
+                  <a:pos x="connsiteX3" y="connsiteY3"/>
+                </a:cxn>
+                <a:cxn ang="0">
+                  <a:pos x="connsiteX4" y="connsiteY4"/>
+                </a:cxn>
+                <a:cxn ang="0">
+                  <a:pos x="connsiteX5" y="connsiteY5"/>
+                </a:cxn>
+                <a:cxn ang="0">
+                  <a:pos x="connsiteX6" y="connsiteY6"/>
+                </a:cxn>
+              </a:cxnLst>
+              <a:rect l="l" t="t" r="r" b="b"/>
+              <a:pathLst>
+                <a:path w="2658746" h="1329373">
+                  <a:moveTo>
+                    <a:pt x="1329373" y="0"/>
+                  </a:moveTo>
+                  <a:cubicBezTo>
+                    <a:pt x="2063565" y="0"/>
+                    <a:pt x="2658746" y="595181"/>
+                    <a:pt x="2658746" y="1329373"/>
+                  </a:cubicBezTo>
+                  <a:lnTo>
+                    <a:pt x="1994059" y="1329373"/>
+                  </a:lnTo>
+                  <a:cubicBezTo>
+                    <a:pt x="1994059" y="962277"/>
+                    <a:pt x="1696469" y="664687"/>
+                    <a:pt x="1329373" y="664687"/>
+                  </a:cubicBezTo>
+                  <a:cubicBezTo>
+                    <a:pt x="962277" y="664687"/>
+                    <a:pt x="664687" y="962277"/>
+                    <a:pt x="664687" y="1329373"/>
+                  </a:cubicBezTo>
+                  <a:lnTo>
+                    <a:pt x="0" y="1329373"/>
+                  </a:lnTo>
+                  <a:cubicBezTo>
+                    <a:pt x="0" y="595181"/>
+                    <a:pt x="595181" y="0"/>
+                    <a:pt x="1329373" y="0"/>
+                  </a:cubicBezTo>
+                  <a:close/>
+                </a:path>
+              </a:pathLst>
+            </a:custGeom>
+            <a:solidFill>
+              <a:schemeClr val="bg2"/>
+            </a:solidFill>
+            <a:ln>
+              <a:noFill/>
+            </a:ln>
+            <a:effectLst>
+              <a:innerShdw blurRad="254000" dist="50800" dir="16200000">
+                <a:schemeClr val="accent1">
+                  <a:lumMod val="40000"/>
+                  <a:lumOff val="60000"/>
+                  <a:alpha val="40000"/>
+                </a:schemeClr>
+              </a:innerShdw>
+            </a:effectLst>
+          </p:spPr>
+          <p:style>
+            <a:lnRef idx="2">
+              <a:schemeClr val="accent1">
+                <a:shade val="50000"/>
+              </a:schemeClr>
+            </a:lnRef>
+            <a:fillRef idx="1">
+              <a:schemeClr val="accent1"/>
+            </a:fillRef>
+            <a:effectRef idx="0">
+              <a:schemeClr val="accent1"/>
+            </a:effectRef>
+            <a:fontRef idx="minor">
+              <a:schemeClr val="lt1"/>
+            </a:fontRef>
+          </p:style>
+          <p:txBody>
+            <a:bodyPr rtlCol="0" anchor="ctr"/>
+            <a:lstStyle/>
+            <a:p>
+              <a:pPr algn="ctr"/>
+              <a:endParaRPr lang="en-US" dirty="0"/>
+            </a:p>
+          </p:txBody>
+        </p:sp>
+        <p:sp>
+          <p:nvSpPr>
+            <p:cNvPr id="18" name="Freeform: Shape 17">
+              <a:extLst>
+                <a:ext uri="{FF2B5EF4-FFF2-40B4-BE49-F238E27FC236}">
+                  <a16:creationId xmlns:a16="http://schemas.microsoft.com/office/drawing/2014/main" id="{B5CA2231-7A65-4D16-8400-A210CC41DB73}"/>
+                </a:ext>
+                <a:ext uri="{C183D7F6-B498-43B3-948B-1728B52AA6E4}">
+                  <adec:decorative xmlns:adec="http://schemas.microsoft.com/office/drawing/2017/decorative" val="1"/>
+                </a:ext>
+              </a:extLst>
+            </p:cNvPr>
+            <p:cNvSpPr>
+              <a:spLocks noChangeAspect="1"/>
+            </p:cNvSpPr>
+            <p:nvPr>
+              <p:extLst>
+                <p:ext uri="{386F3935-93C4-4BCD-93E2-E3B085C9AB24}">
+                  <p16:designElem xmlns:p16="http://schemas.microsoft.com/office/powerpoint/2015/main" val="1"/>
+                </p:ext>
+              </p:extLst>
+            </p:nvPr>
+          </p:nvSpPr>
+          <p:spPr>
+            <a:xfrm rot="18900000" flipV="1">
+              <a:off x="4957101" y="4052255"/>
+              <a:ext cx="1853969" cy="1093090"/>
+            </a:xfrm>
+            <a:custGeom>
+              <a:avLst/>
+              <a:gdLst>
+                <a:gd name="connsiteX0" fmla="*/ 1329373 w 2658746"/>
+                <a:gd name="connsiteY0" fmla="*/ 0 h 1329373"/>
+                <a:gd name="connsiteX1" fmla="*/ 2658746 w 2658746"/>
+                <a:gd name="connsiteY1" fmla="*/ 1329373 h 1329373"/>
+                <a:gd name="connsiteX2" fmla="*/ 1994059 w 2658746"/>
+                <a:gd name="connsiteY2" fmla="*/ 1329373 h 1329373"/>
+                <a:gd name="connsiteX3" fmla="*/ 1329373 w 2658746"/>
+                <a:gd name="connsiteY3" fmla="*/ 664687 h 1329373"/>
+                <a:gd name="connsiteX4" fmla="*/ 664687 w 2658746"/>
+                <a:gd name="connsiteY4" fmla="*/ 1329373 h 1329373"/>
+                <a:gd name="connsiteX5" fmla="*/ 0 w 2658746"/>
+                <a:gd name="connsiteY5" fmla="*/ 1329373 h 1329373"/>
+                <a:gd name="connsiteX6" fmla="*/ 1329373 w 2658746"/>
+                <a:gd name="connsiteY6" fmla="*/ 0 h 1329373"/>
+              </a:gdLst>
+              <a:ahLst/>
+              <a:cxnLst>
+                <a:cxn ang="0">
+                  <a:pos x="connsiteX0" y="connsiteY0"/>
+                </a:cxn>
+                <a:cxn ang="0">
+                  <a:pos x="connsiteX1" y="connsiteY1"/>
+                </a:cxn>
+                <a:cxn ang="0">
+                  <a:pos x="connsiteX2" y="connsiteY2"/>
+                </a:cxn>
+                <a:cxn ang="0">
+                  <a:pos x="connsiteX3" y="connsiteY3"/>
+                </a:cxn>
+                <a:cxn ang="0">
+                  <a:pos x="connsiteX4" y="connsiteY4"/>
+                </a:cxn>
+                <a:cxn ang="0">
+                  <a:pos x="connsiteX5" y="connsiteY5"/>
+                </a:cxn>
+                <a:cxn ang="0">
+                  <a:pos x="connsiteX6" y="connsiteY6"/>
+                </a:cxn>
+              </a:cxnLst>
+              <a:rect l="l" t="t" r="r" b="b"/>
+              <a:pathLst>
+                <a:path w="2658746" h="1329373">
+                  <a:moveTo>
+                    <a:pt x="1329373" y="0"/>
+                  </a:moveTo>
+                  <a:cubicBezTo>
+                    <a:pt x="2063565" y="0"/>
+                    <a:pt x="2658746" y="595181"/>
+                    <a:pt x="2658746" y="1329373"/>
+                  </a:cubicBezTo>
+                  <a:lnTo>
+                    <a:pt x="1994059" y="1329373"/>
+                  </a:lnTo>
+                  <a:cubicBezTo>
+                    <a:pt x="1994059" y="962277"/>
+                    <a:pt x="1696469" y="664687"/>
+                    <a:pt x="1329373" y="664687"/>
+                  </a:cubicBezTo>
+                  <a:cubicBezTo>
+                    <a:pt x="962277" y="664687"/>
+                    <a:pt x="664687" y="962277"/>
+                    <a:pt x="664687" y="1329373"/>
+                  </a:cubicBezTo>
+                  <a:lnTo>
+                    <a:pt x="0" y="1329373"/>
+                  </a:lnTo>
+                  <a:cubicBezTo>
+                    <a:pt x="0" y="595181"/>
+                    <a:pt x="595181" y="0"/>
+                    <a:pt x="1329373" y="0"/>
+                  </a:cubicBezTo>
+                  <a:close/>
+                </a:path>
+              </a:pathLst>
+            </a:custGeom>
+            <a:solidFill>
+              <a:schemeClr val="bg2">
+                <a:lumMod val="50000"/>
+                <a:lumOff val="50000"/>
+                <a:alpha val="40000"/>
+              </a:schemeClr>
+            </a:solidFill>
+            <a:ln>
+              <a:noFill/>
+            </a:ln>
+            <a:effectLst>
+              <a:softEdge rad="190500"/>
+            </a:effectLst>
+          </p:spPr>
+          <p:style>
+            <a:lnRef idx="2">
+              <a:schemeClr val="accent1">
+                <a:shade val="50000"/>
+              </a:schemeClr>
+            </a:lnRef>
+            <a:fillRef idx="1">
+              <a:schemeClr val="accent1"/>
+            </a:fillRef>
+            <a:effectRef idx="0">
+              <a:schemeClr val="accent1"/>
+            </a:effectRef>
+            <a:fontRef idx="minor">
+              <a:schemeClr val="lt1"/>
+            </a:fontRef>
+          </p:style>
+          <p:txBody>
+            <a:bodyPr rtlCol="0" anchor="ctr"/>
+            <a:lstStyle/>
+            <a:p>
+              <a:pPr algn="ctr"/>
+              <a:endParaRPr lang="en-US" dirty="0">
+                <a:solidFill>
+                  <a:schemeClr val="tx1"/>
+                </a:solidFill>
+              </a:endParaRPr>
+            </a:p>
+          </p:txBody>
+        </p:sp>
+        <p:sp>
+          <p:nvSpPr>
+            <p:cNvPr id="19" name="Oval 18">
+              <a:extLst>
+                <a:ext uri="{FF2B5EF4-FFF2-40B4-BE49-F238E27FC236}">
+                  <a16:creationId xmlns:a16="http://schemas.microsoft.com/office/drawing/2014/main" id="{4B089C8C-B82B-4704-88E2-E857A5E21529}"/>
+                </a:ext>
+                <a:ext uri="{C183D7F6-B498-43B3-948B-1728B52AA6E4}">
+                  <adec:decorative xmlns:adec="http://schemas.microsoft.com/office/drawing/2017/decorative" val="1"/>
+                </a:ext>
+              </a:extLst>
+            </p:cNvPr>
+            <p:cNvSpPr/>
+            <p:nvPr>
+              <p:extLst>
+                <p:ext uri="{386F3935-93C4-4BCD-93E2-E3B085C9AB24}">
+                  <p16:designElem xmlns:p16="http://schemas.microsoft.com/office/powerpoint/2015/main" val="1"/>
+                </p:ext>
+              </p:extLst>
+            </p:nvPr>
+          </p:nvSpPr>
+          <p:spPr>
+            <a:xfrm rot="13500000" flipV="1">
+              <a:off x="6040374" y="3601683"/>
+              <a:ext cx="107098" cy="466589"/>
+            </a:xfrm>
+            <a:prstGeom prst="ellipse">
+              <a:avLst/>
+            </a:prstGeom>
+            <a:solidFill>
+              <a:schemeClr val="bg2">
+                <a:lumMod val="90000"/>
+                <a:lumOff val="10000"/>
+              </a:schemeClr>
+            </a:solidFill>
+            <a:ln>
+              <a:noFill/>
+            </a:ln>
+            <a:effectLst>
+              <a:innerShdw blurRad="63500" dist="2540000">
+                <a:schemeClr val="accent1">
+                  <a:lumMod val="60000"/>
+                  <a:lumOff val="40000"/>
+                  <a:alpha val="0"/>
+                </a:schemeClr>
+              </a:innerShdw>
+            </a:effectLst>
+          </p:spPr>
+          <p:style>
+            <a:lnRef idx="2">
+              <a:schemeClr val="accent1">
+                <a:shade val="50000"/>
+              </a:schemeClr>
+            </a:lnRef>
+            <a:fillRef idx="1">
+              <a:schemeClr val="accent1"/>
+            </a:fillRef>
+            <a:effectRef idx="0">
+              <a:schemeClr val="accent1"/>
+            </a:effectRef>
+            <a:fontRef idx="minor">
+              <a:schemeClr val="lt1"/>
+            </a:fontRef>
+          </p:style>
+          <p:txBody>
+            <a:bodyPr rot="0" spcFirstLastPara="0" vertOverflow="overflow" horzOverflow="overflow" vert="horz" wrap="square" lIns="91440" tIns="45720" rIns="91440" bIns="45720" numCol="1" spcCol="0" rtlCol="0" fromWordArt="0" anchor="ctr" anchorCtr="0" forceAA="0" compatLnSpc="1">
+              <a:prstTxWarp prst="textNoShape">
+                <a:avLst/>
+              </a:prstTxWarp>
+              <a:noAutofit/>
+            </a:bodyPr>
+            <a:lstStyle/>
+            <a:p>
+              <a:pPr algn="ctr"/>
+              <a:endParaRPr lang="en-US"/>
+            </a:p>
+          </p:txBody>
+        </p:sp>
+        <p:sp>
+          <p:nvSpPr>
+            <p:cNvPr id="20" name="Oval 19">
+              <a:extLst>
+                <a:ext uri="{FF2B5EF4-FFF2-40B4-BE49-F238E27FC236}">
+                  <a16:creationId xmlns:a16="http://schemas.microsoft.com/office/drawing/2014/main" id="{434B90C8-5B4D-456E-AD99-80EF748FDD72}"/>
+                </a:ext>
+                <a:ext uri="{C183D7F6-B498-43B3-948B-1728B52AA6E4}">
+                  <adec:decorative xmlns:adec="http://schemas.microsoft.com/office/drawing/2017/decorative" val="1"/>
+                </a:ext>
+              </a:extLst>
+            </p:cNvPr>
+            <p:cNvSpPr/>
+            <p:nvPr>
+              <p:extLst>
+                <p:ext uri="{386F3935-93C4-4BCD-93E2-E3B085C9AB24}">
+                  <p16:designElem xmlns:p16="http://schemas.microsoft.com/office/powerpoint/2015/main" val="1"/>
+                </p:ext>
+              </p:extLst>
+            </p:nvPr>
+          </p:nvSpPr>
+          <p:spPr>
+            <a:xfrm rot="13500000" flipV="1">
+              <a:off x="5059348" y="4582709"/>
+              <a:ext cx="107098" cy="466589"/>
+            </a:xfrm>
+            <a:prstGeom prst="ellipse">
+              <a:avLst/>
+            </a:prstGeom>
+            <a:solidFill>
+              <a:schemeClr val="bg2">
+                <a:lumMod val="90000"/>
+                <a:lumOff val="10000"/>
+              </a:schemeClr>
+            </a:solidFill>
+            <a:ln>
+              <a:noFill/>
+            </a:ln>
+            <a:effectLst>
+              <a:innerShdw blurRad="63500" dist="2540000">
+                <a:schemeClr val="accent1">
+                  <a:lumMod val="60000"/>
+                  <a:lumOff val="40000"/>
+                  <a:alpha val="0"/>
+                </a:schemeClr>
+              </a:innerShdw>
+            </a:effectLst>
+          </p:spPr>
+          <p:style>
+            <a:lnRef idx="2">
+              <a:schemeClr val="accent1">
+                <a:shade val="50000"/>
+              </a:schemeClr>
+            </a:lnRef>
+            <a:fillRef idx="1">
+              <a:schemeClr val="accent1"/>
+            </a:fillRef>
+            <a:effectRef idx="0">
+              <a:schemeClr val="accent1"/>
+            </a:effectRef>
+            <a:fontRef idx="minor">
+              <a:schemeClr val="lt1"/>
+            </a:fontRef>
+          </p:style>
+          <p:txBody>
+            <a:bodyPr rot="0" spcFirstLastPara="0" vertOverflow="overflow" horzOverflow="overflow" vert="horz" wrap="square" lIns="91440" tIns="45720" rIns="91440" bIns="45720" numCol="1" spcCol="0" rtlCol="0" fromWordArt="0" anchor="ctr" anchorCtr="0" forceAA="0" compatLnSpc="1">
+              <a:prstTxWarp prst="textNoShape">
+                <a:avLst/>
+              </a:prstTxWarp>
+              <a:noAutofit/>
+            </a:bodyPr>
+            <a:lstStyle/>
+            <a:p>
+              <a:pPr algn="ctr"/>
+              <a:endParaRPr lang="en-US"/>
+            </a:p>
+          </p:txBody>
+        </p:sp>
+      </p:grpSp>
+      <p:sp useBgFill="1">
+        <p:nvSpPr>
+          <p:cNvPr id="22" name="Rectangle 21">
+            <a:extLst>
+              <a:ext uri="{FF2B5EF4-FFF2-40B4-BE49-F238E27FC236}">
+                <a16:creationId xmlns:a16="http://schemas.microsoft.com/office/drawing/2014/main" id="{1DB043B4-68C6-45B9-82AC-A5800EADB8DB}"/>
+              </a:ext>
+              <a:ext uri="{C183D7F6-B498-43B3-948B-1728B52AA6E4}">
+                <adec:decorative xmlns:adec="http://schemas.microsoft.com/office/drawing/2017/decorative" val="1"/>
+              </a:ext>
+            </a:extLst>
+          </p:cNvPr>
+          <p:cNvSpPr>
+            <a:spLocks noGrp="1" noRot="1" noChangeAspect="1" noMove="1" noResize="1" noEditPoints="1" noAdjustHandles="1" noChangeArrowheads="1" noChangeShapeType="1" noTextEdit="1"/>
+          </p:cNvSpPr>
+          <p:nvPr>
+            <p:extLst>
+              <p:ext uri="{386F3935-93C4-4BCD-93E2-E3B085C9AB24}">
+                <p16:designElem xmlns:p16="http://schemas.microsoft.com/office/powerpoint/2015/main" val="1"/>
+              </p:ext>
+            </p:extLst>
+          </p:nvPr>
+        </p:nvSpPr>
+        <p:spPr>
+          <a:xfrm>
+            <a:off x="0" y="0"/>
+            <a:ext cx="12192000" cy="6858000"/>
+          </a:xfrm>
+          <a:prstGeom prst="rect">
+            <a:avLst/>
+          </a:prstGeom>
+          <a:ln w="12700" cap="flat" cmpd="sng" algn="ctr">
+            <a:noFill/>
+            <a:prstDash val="solid"/>
+            <a:miter lim="800000"/>
+          </a:ln>
+          <a:effectLst/>
+          <a:extLst>
+            <a:ext uri="{91240B29-F687-4F45-9708-019B960494DF}">
+              <a14:hiddenLine xmlns:a14="http://schemas.microsoft.com/office/drawing/2010/main" w="12700" cap="flat" cmpd="sng" algn="ctr">
+                <a:solidFill>
+                  <a:schemeClr val="accent1">
+                    <a:shade val="50000"/>
+                  </a:schemeClr>
+                </a:solidFill>
+                <a:prstDash val="solid"/>
+                <a:miter lim="800000"/>
+              </a14:hiddenLine>
+            </a:ext>
+          </a:extLst>
+        </p:spPr>
+        <p:style>
+          <a:lnRef idx="2">
+            <a:schemeClr val="accent1">
+              <a:shade val="50000"/>
+            </a:schemeClr>
+          </a:lnRef>
+          <a:fillRef idx="1">
+            <a:schemeClr val="accent1"/>
+          </a:fillRef>
+          <a:effectRef idx="0">
+            <a:schemeClr val="accent1"/>
+          </a:effectRef>
+          <a:fontRef idx="minor">
+            <a:schemeClr val="lt1"/>
+          </a:fontRef>
+        </p:style>
+        <p:txBody>
+          <a:bodyPr rtlCol="0" anchor="ctr"/>
+          <a:lstStyle/>
+          <a:p>
+            <a:pPr algn="ctr"/>
+            <a:endParaRPr lang="en-US"/>
+          </a:p>
+        </p:txBody>
+      </p:sp>
+      <p:sp>
+        <p:nvSpPr>
+          <p:cNvPr id="24" name="Oval 23">
+            <a:extLst>
+              <a:ext uri="{FF2B5EF4-FFF2-40B4-BE49-F238E27FC236}">
+                <a16:creationId xmlns:a16="http://schemas.microsoft.com/office/drawing/2014/main" id="{28A00A08-E4E6-4184-B484-E0E034072AE0}"/>
+              </a:ext>
+              <a:ext uri="{C183D7F6-B498-43B3-948B-1728B52AA6E4}">
+                <adec:decorative xmlns:adec="http://schemas.microsoft.com/office/drawing/2017/decorative" val="1"/>
+              </a:ext>
+            </a:extLst>
+          </p:cNvPr>
+          <p:cNvSpPr>
+            <a:spLocks noGrp="1" noRot="1" noChangeAspect="1" noMove="1" noResize="1" noEditPoints="1" noAdjustHandles="1" noChangeArrowheads="1" noChangeShapeType="1" noTextEdit="1"/>
+          </p:cNvSpPr>
+          <p:nvPr>
+            <p:extLst>
+              <p:ext uri="{386F3935-93C4-4BCD-93E2-E3B085C9AB24}">
+                <p16:designElem xmlns:p16="http://schemas.microsoft.com/office/powerpoint/2015/main" val="1"/>
+              </p:ext>
+            </p:extLst>
+          </p:nvPr>
+        </p:nvSpPr>
+        <p:spPr>
+          <a:xfrm>
+            <a:off x="281171" y="1388266"/>
+            <a:ext cx="360000" cy="360000"/>
+          </a:xfrm>
+          <a:prstGeom prst="ellipse">
+            <a:avLst/>
+          </a:prstGeom>
+          <a:gradFill flip="none" rotWithShape="1">
+            <a:gsLst>
+              <a:gs pos="100000">
+                <a:schemeClr val="bg2">
+                  <a:lumMod val="50000"/>
+                  <a:lumOff val="50000"/>
+                </a:schemeClr>
+              </a:gs>
+              <a:gs pos="60000">
+                <a:schemeClr val="bg2"/>
+              </a:gs>
+            </a:gsLst>
+            <a:path path="circle">
+              <a:fillToRect l="100000" b="100000"/>
+            </a:path>
+            <a:tileRect t="-100000" r="-100000"/>
+          </a:gradFill>
+          <a:ln>
+            <a:noFill/>
+          </a:ln>
+          <a:effectLst>
+            <a:innerShdw blurRad="127000" dist="63500" dir="2700000">
+              <a:schemeClr val="accent1">
+                <a:lumMod val="60000"/>
+                <a:lumOff val="40000"/>
+                <a:alpha val="20000"/>
+              </a:schemeClr>
+            </a:innerShdw>
+            <a:softEdge rad="0"/>
+          </a:effectLst>
+        </p:spPr>
+        <p:style>
+          <a:lnRef idx="2">
+            <a:schemeClr val="accent1">
+              <a:shade val="50000"/>
+            </a:schemeClr>
+          </a:lnRef>
+          <a:fillRef idx="1">
+            <a:schemeClr val="accent1"/>
+          </a:fillRef>
+          <a:effectRef idx="0">
+            <a:schemeClr val="accent1"/>
+          </a:effectRef>
+          <a:fontRef idx="minor">
+            <a:schemeClr val="lt1"/>
+          </a:fontRef>
+        </p:style>
+        <p:txBody>
+          <a:bodyPr rot="0" spcFirstLastPara="0" vertOverflow="overflow" horzOverflow="overflow" vert="horz" wrap="square" lIns="91440" tIns="45720" rIns="91440" bIns="45720" numCol="1" spcCol="0" rtlCol="0" fromWordArt="0" anchor="ctr" anchorCtr="0" forceAA="0" compatLnSpc="1">
+            <a:prstTxWarp prst="textNoShape">
+              <a:avLst/>
+            </a:prstTxWarp>
+            <a:noAutofit/>
+          </a:bodyPr>
+          <a:lstStyle/>
+          <a:p>
+            <a:pPr algn="ctr"/>
+            <a:endParaRPr lang="en-US"/>
+          </a:p>
+        </p:txBody>
+      </p:sp>
+      <p:grpSp>
+        <p:nvGrpSpPr>
+          <p:cNvPr id="26" name="Group 25">
+            <a:extLst>
+              <a:ext uri="{FF2B5EF4-FFF2-40B4-BE49-F238E27FC236}">
+                <a16:creationId xmlns:a16="http://schemas.microsoft.com/office/drawing/2014/main" id="{0780E404-3121-4F33-AF2D-65F659A97798}"/>
+              </a:ext>
+              <a:ext uri="{C183D7F6-B498-43B3-948B-1728B52AA6E4}">
+                <adec:decorative xmlns:adec="http://schemas.microsoft.com/office/drawing/2017/decorative" val="1"/>
+              </a:ext>
+            </a:extLst>
+          </p:cNvPr>
+          <p:cNvGrpSpPr>
+            <a:grpSpLocks noGrp="1" noUngrp="1" noRot="1" noChangeAspect="1" noMove="1" noResize="1"/>
+          </p:cNvGrpSpPr>
+          <p:nvPr>
+            <p:extLst>
+              <p:ext uri="{386F3935-93C4-4BCD-93E2-E3B085C9AB24}">
+                <p16:designElem xmlns:p16="http://schemas.microsoft.com/office/powerpoint/2015/main" val="1"/>
+              </p:ext>
+            </p:extLst>
+          </p:nvPr>
+        </p:nvGrpSpPr>
+        <p:grpSpPr>
+          <a:xfrm>
+            <a:off x="2727675" y="288981"/>
+            <a:ext cx="1262947" cy="1335600"/>
+            <a:chOff x="2678417" y="2427951"/>
+            <a:chExt cx="1262947" cy="1335600"/>
+          </a:xfrm>
+        </p:grpSpPr>
+        <p:sp>
+          <p:nvSpPr>
+            <p:cNvPr id="27" name="Freeform: Shape 26">
+              <a:extLst>
+                <a:ext uri="{FF2B5EF4-FFF2-40B4-BE49-F238E27FC236}">
+                  <a16:creationId xmlns:a16="http://schemas.microsoft.com/office/drawing/2014/main" id="{2339341D-8322-49F1-91DA-6D115CCAE7AB}"/>
+                </a:ext>
+                <a:ext uri="{C183D7F6-B498-43B3-948B-1728B52AA6E4}">
+                  <adec:decorative xmlns:adec="http://schemas.microsoft.com/office/drawing/2017/decorative" val="1"/>
+                </a:ext>
+              </a:extLst>
+            </p:cNvPr>
+            <p:cNvSpPr>
+              <a:spLocks noChangeAspect="1"/>
+            </p:cNvSpPr>
+            <p:nvPr>
+              <p:extLst>
+                <p:ext uri="{386F3935-93C4-4BCD-93E2-E3B085C9AB24}">
+                  <p16:designElem xmlns:p16="http://schemas.microsoft.com/office/powerpoint/2015/main" val="1"/>
+                </p:ext>
+              </p:extLst>
+            </p:nvPr>
+          </p:nvSpPr>
+          <p:spPr>
+            <a:xfrm rot="2700000">
+              <a:off x="2769891" y="2336477"/>
+              <a:ext cx="1080000" cy="1262947"/>
+            </a:xfrm>
+            <a:custGeom>
+              <a:avLst/>
+              <a:gdLst>
+                <a:gd name="connsiteX0" fmla="*/ 540000 w 1080000"/>
+                <a:gd name="connsiteY0" fmla="*/ 0 h 1262947"/>
+                <a:gd name="connsiteX1" fmla="*/ 1080000 w 1080000"/>
+                <a:gd name="connsiteY1" fmla="*/ 931034 h 1262947"/>
+                <a:gd name="connsiteX2" fmla="*/ 1064374 w 1080000"/>
+                <a:gd name="connsiteY2" fmla="*/ 931034 h 1262947"/>
+                <a:gd name="connsiteX3" fmla="*/ 1069029 w 1080000"/>
+                <a:gd name="connsiteY3" fmla="*/ 938533 h 1262947"/>
+                <a:gd name="connsiteX4" fmla="*/ 1080000 w 1080000"/>
+                <a:gd name="connsiteY4" fmla="*/ 992947 h 1262947"/>
+                <a:gd name="connsiteX5" fmla="*/ 540000 w 1080000"/>
+                <a:gd name="connsiteY5" fmla="*/ 1262947 h 1262947"/>
+                <a:gd name="connsiteX6" fmla="*/ 0 w 1080000"/>
+                <a:gd name="connsiteY6" fmla="*/ 992947 h 1262947"/>
+                <a:gd name="connsiteX7" fmla="*/ 10971 w 1080000"/>
+                <a:gd name="connsiteY7" fmla="*/ 938533 h 1262947"/>
+                <a:gd name="connsiteX8" fmla="*/ 15626 w 1080000"/>
+                <a:gd name="connsiteY8" fmla="*/ 931034 h 1262947"/>
+                <a:gd name="connsiteX9" fmla="*/ 0 w 1080000"/>
+                <a:gd name="connsiteY9" fmla="*/ 931034 h 1262947"/>
+                <a:gd name="connsiteX0" fmla="*/ 540000 w 1080000"/>
+                <a:gd name="connsiteY0" fmla="*/ 0 h 1262947"/>
+                <a:gd name="connsiteX1" fmla="*/ 1080000 w 1080000"/>
+                <a:gd name="connsiteY1" fmla="*/ 931034 h 1262947"/>
+                <a:gd name="connsiteX2" fmla="*/ 1064374 w 1080000"/>
+                <a:gd name="connsiteY2" fmla="*/ 931034 h 1262947"/>
+                <a:gd name="connsiteX3" fmla="*/ 1069029 w 1080000"/>
+                <a:gd name="connsiteY3" fmla="*/ 938533 h 1262947"/>
+                <a:gd name="connsiteX4" fmla="*/ 1080000 w 1080000"/>
+                <a:gd name="connsiteY4" fmla="*/ 992947 h 1262947"/>
+                <a:gd name="connsiteX5" fmla="*/ 540000 w 1080000"/>
+                <a:gd name="connsiteY5" fmla="*/ 1262947 h 1262947"/>
+                <a:gd name="connsiteX6" fmla="*/ 0 w 1080000"/>
+                <a:gd name="connsiteY6" fmla="*/ 992947 h 1262947"/>
+                <a:gd name="connsiteX7" fmla="*/ 10971 w 1080000"/>
+                <a:gd name="connsiteY7" fmla="*/ 938533 h 1262947"/>
+                <a:gd name="connsiteX8" fmla="*/ 15626 w 1080000"/>
+                <a:gd name="connsiteY8" fmla="*/ 931034 h 1262947"/>
+                <a:gd name="connsiteX9" fmla="*/ 540000 w 1080000"/>
+                <a:gd name="connsiteY9" fmla="*/ 0 h 1262947"/>
+                <a:gd name="connsiteX0" fmla="*/ 540000 w 1080000"/>
+                <a:gd name="connsiteY0" fmla="*/ 0 h 1262947"/>
+                <a:gd name="connsiteX1" fmla="*/ 1064374 w 1080000"/>
+                <a:gd name="connsiteY1" fmla="*/ 931034 h 1262947"/>
+                <a:gd name="connsiteX2" fmla="*/ 1069029 w 1080000"/>
+                <a:gd name="connsiteY2" fmla="*/ 938533 h 1262947"/>
+                <a:gd name="connsiteX3" fmla="*/ 1080000 w 1080000"/>
+                <a:gd name="connsiteY3" fmla="*/ 992947 h 1262947"/>
+                <a:gd name="connsiteX4" fmla="*/ 540000 w 1080000"/>
+                <a:gd name="connsiteY4" fmla="*/ 1262947 h 1262947"/>
+                <a:gd name="connsiteX5" fmla="*/ 0 w 1080000"/>
+                <a:gd name="connsiteY5" fmla="*/ 992947 h 1262947"/>
+                <a:gd name="connsiteX6" fmla="*/ 10971 w 1080000"/>
+                <a:gd name="connsiteY6" fmla="*/ 938533 h 1262947"/>
+                <a:gd name="connsiteX7" fmla="*/ 15626 w 1080000"/>
+                <a:gd name="connsiteY7" fmla="*/ 931034 h 1262947"/>
+                <a:gd name="connsiteX8" fmla="*/ 540000 w 1080000"/>
+                <a:gd name="connsiteY8" fmla="*/ 0 h 1262947"/>
+              </a:gdLst>
+              <a:ahLst/>
+              <a:cxnLst>
+                <a:cxn ang="0">
+                  <a:pos x="connsiteX0" y="connsiteY0"/>
+                </a:cxn>
+                <a:cxn ang="0">
+                  <a:pos x="connsiteX1" y="connsiteY1"/>
+                </a:cxn>
+                <a:cxn ang="0">
+                  <a:pos x="connsiteX2" y="connsiteY2"/>
+                </a:cxn>
+                <a:cxn ang="0">
+                  <a:pos x="connsiteX3" y="connsiteY3"/>
+                </a:cxn>
+                <a:cxn ang="0">
+                  <a:pos x="connsiteX4" y="connsiteY4"/>
+                </a:cxn>
+                <a:cxn ang="0">
+                  <a:pos x="connsiteX5" y="connsiteY5"/>
+                </a:cxn>
+                <a:cxn ang="0">
+                  <a:pos x="connsiteX6" y="connsiteY6"/>
+                </a:cxn>
+                <a:cxn ang="0">
+                  <a:pos x="connsiteX7" y="connsiteY7"/>
+                </a:cxn>
+                <a:cxn ang="0">
+                  <a:pos x="connsiteX8" y="connsiteY8"/>
+                </a:cxn>
+              </a:cxnLst>
+              <a:rect l="l" t="t" r="r" b="b"/>
+              <a:pathLst>
+                <a:path w="1080000" h="1262947">
+                  <a:moveTo>
+                    <a:pt x="540000" y="0"/>
+                  </a:moveTo>
+                  <a:lnTo>
+                    <a:pt x="1064374" y="931034"/>
+                  </a:lnTo>
+                  <a:lnTo>
+                    <a:pt x="1069029" y="938533"/>
+                  </a:lnTo>
+                  <a:cubicBezTo>
+                    <a:pt x="1076223" y="956109"/>
+                    <a:pt x="1080000" y="974307"/>
+                    <a:pt x="1080000" y="992947"/>
+                  </a:cubicBezTo>
+                  <a:cubicBezTo>
+                    <a:pt x="1080000" y="1142064"/>
+                    <a:pt x="838234" y="1262947"/>
+                    <a:pt x="540000" y="1262947"/>
+                  </a:cubicBezTo>
+                  <a:cubicBezTo>
+                    <a:pt x="241766" y="1262947"/>
+                    <a:pt x="0" y="1142064"/>
+                    <a:pt x="0" y="992947"/>
+                  </a:cubicBezTo>
+                  <a:cubicBezTo>
+                    <a:pt x="0" y="974307"/>
+                    <a:pt x="3778" y="956109"/>
+                    <a:pt x="10971" y="938533"/>
+                  </a:cubicBezTo>
+                  <a:lnTo>
+                    <a:pt x="15626" y="931034"/>
+                  </a:lnTo>
+                  <a:lnTo>
+                    <a:pt x="540000" y="0"/>
+                  </a:lnTo>
+                  <a:close/>
+                </a:path>
+              </a:pathLst>
+            </a:custGeom>
+            <a:gradFill>
+              <a:gsLst>
+                <a:gs pos="60000">
+                  <a:schemeClr val="bg2">
+                    <a:lumMod val="90000"/>
+                    <a:lumOff val="10000"/>
+                  </a:schemeClr>
+                </a:gs>
+                <a:gs pos="30000">
+                  <a:schemeClr val="bg2">
+                    <a:lumMod val="90000"/>
+                    <a:lumOff val="10000"/>
+                  </a:schemeClr>
+                </a:gs>
+                <a:gs pos="40000">
+                  <a:schemeClr val="bg2">
+                    <a:lumMod val="75000"/>
+                    <a:lumOff val="25000"/>
+                  </a:schemeClr>
+                </a:gs>
+                <a:gs pos="100000">
+                  <a:schemeClr val="bg2"/>
+                </a:gs>
+              </a:gsLst>
+              <a:lin ang="600000" scaled="0"/>
+            </a:gradFill>
+            <a:ln>
+              <a:noFill/>
+            </a:ln>
+            <a:effectLst>
+              <a:innerShdw blurRad="254000" dist="101600" dir="2700000">
+                <a:schemeClr val="accent1">
+                  <a:lumMod val="60000"/>
+                  <a:lumOff val="40000"/>
+                  <a:alpha val="40000"/>
+                </a:schemeClr>
+              </a:innerShdw>
+            </a:effectLst>
+          </p:spPr>
+          <p:style>
+            <a:lnRef idx="2">
+              <a:schemeClr val="accent1">
+                <a:shade val="50000"/>
+              </a:schemeClr>
+            </a:lnRef>
+            <a:fillRef idx="1">
+              <a:schemeClr val="accent1"/>
+            </a:fillRef>
+            <a:effectRef idx="0">
+              <a:schemeClr val="accent1"/>
+            </a:effectRef>
+            <a:fontRef idx="minor">
+              <a:schemeClr val="lt1"/>
+            </a:fontRef>
+          </p:style>
+          <p:txBody>
+            <a:bodyPr rot="0" spcFirstLastPara="0" vertOverflow="overflow" horzOverflow="overflow" vert="horz" wrap="square" lIns="91440" tIns="45720" rIns="91440" bIns="45720" numCol="1" spcCol="0" rtlCol="0" fromWordArt="0" anchor="ctr" anchorCtr="0" forceAA="0" compatLnSpc="1">
+              <a:prstTxWarp prst="textNoShape">
+                <a:avLst/>
+              </a:prstTxWarp>
+              <a:noAutofit/>
+            </a:bodyPr>
+            <a:lstStyle/>
+            <a:p>
+              <a:pPr algn="ctr"/>
+              <a:endParaRPr lang="en-US"/>
+            </a:p>
+          </p:txBody>
+        </p:sp>
+        <p:sp>
+          <p:nvSpPr>
+            <p:cNvPr id="28" name="Oval 27">
+              <a:extLst>
+                <a:ext uri="{FF2B5EF4-FFF2-40B4-BE49-F238E27FC236}">
+                  <a16:creationId xmlns:a16="http://schemas.microsoft.com/office/drawing/2014/main" id="{7EB9DB0E-3B0E-411A-9274-448D565CA491}"/>
+                </a:ext>
+                <a:ext uri="{C183D7F6-B498-43B3-948B-1728B52AA6E4}">
+                  <adec:decorative xmlns:adec="http://schemas.microsoft.com/office/drawing/2017/decorative" val="1"/>
+                </a:ext>
+              </a:extLst>
+            </p:cNvPr>
+            <p:cNvSpPr/>
+            <p:nvPr>
+              <p:extLst>
+                <p:ext uri="{386F3935-93C4-4BCD-93E2-E3B085C9AB24}">
+                  <p16:designElem xmlns:p16="http://schemas.microsoft.com/office/powerpoint/2015/main" val="1"/>
+                </p:ext>
+              </p:extLst>
+            </p:nvPr>
+          </p:nvSpPr>
+          <p:spPr>
+            <a:xfrm rot="8100000">
+              <a:off x="2784291" y="2683551"/>
+              <a:ext cx="540000" cy="1080000"/>
+            </a:xfrm>
+            <a:prstGeom prst="ellipse">
+              <a:avLst/>
+            </a:prstGeom>
+            <a:gradFill>
+              <a:gsLst>
+                <a:gs pos="100000">
+                  <a:schemeClr val="bg2">
+                    <a:lumMod val="90000"/>
+                    <a:lumOff val="10000"/>
+                  </a:schemeClr>
+                </a:gs>
+                <a:gs pos="50000">
+                  <a:schemeClr val="bg2">
+                    <a:lumMod val="95000"/>
+                    <a:lumOff val="5000"/>
+                  </a:schemeClr>
+                </a:gs>
+              </a:gsLst>
+              <a:lin ang="5400000" scaled="0"/>
+            </a:gradFill>
+            <a:ln>
+              <a:noFill/>
+            </a:ln>
+            <a:effectLst>
+              <a:innerShdw blurRad="1270000" dist="2540000">
+                <a:schemeClr val="accent1">
+                  <a:lumMod val="60000"/>
+                  <a:lumOff val="40000"/>
+                  <a:alpha val="0"/>
+                </a:schemeClr>
+              </a:innerShdw>
+            </a:effectLst>
+          </p:spPr>
+          <p:style>
+            <a:lnRef idx="2">
+              <a:schemeClr val="accent1">
+                <a:shade val="50000"/>
+              </a:schemeClr>
+            </a:lnRef>
+            <a:fillRef idx="1">
+              <a:schemeClr val="accent1"/>
+            </a:fillRef>
+            <a:effectRef idx="0">
+              <a:schemeClr val="accent1"/>
+            </a:effectRef>
+            <a:fontRef idx="minor">
+              <a:schemeClr val="lt1"/>
+            </a:fontRef>
+          </p:style>
+          <p:txBody>
+            <a:bodyPr rot="0" spcFirstLastPara="0" vertOverflow="overflow" horzOverflow="overflow" vert="horz" wrap="square" lIns="91440" tIns="45720" rIns="91440" bIns="45720" numCol="1" spcCol="0" rtlCol="0" fromWordArt="0" anchor="ctr" anchorCtr="0" forceAA="0" compatLnSpc="1">
+              <a:prstTxWarp prst="textNoShape">
+                <a:avLst/>
+              </a:prstTxWarp>
+              <a:noAutofit/>
+            </a:bodyPr>
+            <a:lstStyle/>
+            <a:p>
+              <a:pPr algn="ctr"/>
+              <a:endParaRPr lang="en-US"/>
+            </a:p>
+          </p:txBody>
+        </p:sp>
+      </p:grpSp>
       <p:sp>
         <p:nvSpPr>
           <p:cNvPr id="2" name="Title 1">
@@ -16677,72 +19740,634 @@
           </p:nvPr>
         </p:nvSpPr>
         <p:spPr>
+          <a:xfrm>
+            <a:off x="550864" y="549275"/>
+            <a:ext cx="3565524" cy="3034657"/>
+          </a:xfrm>
+        </p:spPr>
+        <p:txBody>
+          <a:bodyPr vert="horz" wrap="square" lIns="0" tIns="0" rIns="0" bIns="0" rtlCol="0" anchor="b" anchorCtr="0">
+            <a:normAutofit/>
+          </a:bodyPr>
+          <a:lstStyle/>
+          <a:p>
+            <a:pPr>
+              <a:lnSpc>
+                <a:spcPct val="100000"/>
+              </a:lnSpc>
+            </a:pPr>
+            <a:r>
+              <a:rPr lang="en-US" sz="4800" dirty="0"/>
+              <a:t>Git Hub &amp; Power BI Links</a:t>
+            </a:r>
+          </a:p>
+        </p:txBody>
+      </p:sp>
+      <p:grpSp>
+        <p:nvGrpSpPr>
+          <p:cNvPr id="30" name="Group 29">
+            <a:extLst>
+              <a:ext uri="{FF2B5EF4-FFF2-40B4-BE49-F238E27FC236}">
+                <a16:creationId xmlns:a16="http://schemas.microsoft.com/office/drawing/2014/main" id="{4B158E9A-DBF4-4AA7-B6B7-8C8EB2FBDD68}"/>
+              </a:ext>
+              <a:ext uri="{C183D7F6-B498-43B3-948B-1728B52AA6E4}">
+                <adec:decorative xmlns:adec="http://schemas.microsoft.com/office/drawing/2017/decorative" val="1"/>
+              </a:ext>
+            </a:extLst>
+          </p:cNvPr>
+          <p:cNvGrpSpPr>
+            <a:grpSpLocks noGrp="1" noUngrp="1" noRot="1" noChangeAspect="1" noMove="1" noResize="1"/>
+          </p:cNvGrpSpPr>
+          <p:nvPr>
+            <p:extLst>
+              <p:ext uri="{386F3935-93C4-4BCD-93E2-E3B085C9AB24}">
+                <p16:designElem xmlns:p16="http://schemas.microsoft.com/office/powerpoint/2015/main" val="1"/>
+              </p:ext>
+            </p:extLst>
+          </p:nvPr>
+        </p:nvGrpSpPr>
+        <p:grpSpPr>
+          <a:xfrm>
+            <a:off x="2125249" y="5435090"/>
+            <a:ext cx="762805" cy="734873"/>
+            <a:chOff x="7950336" y="1300590"/>
+            <a:chExt cx="762805" cy="734873"/>
+          </a:xfrm>
+        </p:grpSpPr>
+        <p:sp>
+          <p:nvSpPr>
+            <p:cNvPr id="31" name="Freeform 5">
+              <a:extLst>
+                <a:ext uri="{FF2B5EF4-FFF2-40B4-BE49-F238E27FC236}">
+                  <a16:creationId xmlns:a16="http://schemas.microsoft.com/office/drawing/2014/main" id="{6150ACFD-AEC6-42A3-A5A7-E7AD6B13E03E}"/>
+                </a:ext>
+                <a:ext uri="{C183D7F6-B498-43B3-948B-1728B52AA6E4}">
+                  <adec:decorative xmlns:adec="http://schemas.microsoft.com/office/drawing/2017/decorative" val="1"/>
+                </a:ext>
+              </a:extLst>
+            </p:cNvPr>
+            <p:cNvSpPr>
+              <a:spLocks/>
+            </p:cNvSpPr>
+            <p:nvPr>
+              <p:extLst>
+                <p:ext uri="{386F3935-93C4-4BCD-93E2-E3B085C9AB24}">
+                  <p16:designElem xmlns:p16="http://schemas.microsoft.com/office/powerpoint/2015/main" val="1"/>
+                </p:ext>
+              </p:extLst>
+            </p:nvPr>
+          </p:nvSpPr>
+          <p:spPr bwMode="auto">
+            <a:xfrm rot="3600000">
+              <a:off x="8220298" y="1428832"/>
+              <a:ext cx="621086" cy="364601"/>
+            </a:xfrm>
+            <a:custGeom>
+              <a:avLst/>
+              <a:gdLst>
+                <a:gd name="T0" fmla="*/ 266 w 540"/>
+                <a:gd name="T1" fmla="*/ 0 h 317"/>
+                <a:gd name="T2" fmla="*/ 0 w 540"/>
+                <a:gd name="T3" fmla="*/ 158 h 317"/>
+                <a:gd name="T4" fmla="*/ 266 w 540"/>
+                <a:gd name="T5" fmla="*/ 317 h 317"/>
+                <a:gd name="T6" fmla="*/ 540 w 540"/>
+                <a:gd name="T7" fmla="*/ 158 h 317"/>
+                <a:gd name="T8" fmla="*/ 266 w 540"/>
+                <a:gd name="T9" fmla="*/ 0 h 317"/>
+              </a:gdLst>
+              <a:ahLst/>
+              <a:cxnLst>
+                <a:cxn ang="0">
+                  <a:pos x="T0" y="T1"/>
+                </a:cxn>
+                <a:cxn ang="0">
+                  <a:pos x="T2" y="T3"/>
+                </a:cxn>
+                <a:cxn ang="0">
+                  <a:pos x="T4" y="T5"/>
+                </a:cxn>
+                <a:cxn ang="0">
+                  <a:pos x="T6" y="T7"/>
+                </a:cxn>
+                <a:cxn ang="0">
+                  <a:pos x="T8" y="T9"/>
+                </a:cxn>
+              </a:cxnLst>
+              <a:rect l="0" t="0" r="r" b="b"/>
+              <a:pathLst>
+                <a:path w="540" h="317">
+                  <a:moveTo>
+                    <a:pt x="266" y="0"/>
+                  </a:moveTo>
+                  <a:lnTo>
+                    <a:pt x="0" y="158"/>
+                  </a:lnTo>
+                  <a:lnTo>
+                    <a:pt x="266" y="317"/>
+                  </a:lnTo>
+                  <a:lnTo>
+                    <a:pt x="540" y="158"/>
+                  </a:lnTo>
+                  <a:lnTo>
+                    <a:pt x="266" y="0"/>
+                  </a:lnTo>
+                  <a:close/>
+                </a:path>
+              </a:pathLst>
+            </a:custGeom>
+            <a:gradFill flip="none" rotWithShape="1">
+              <a:gsLst>
+                <a:gs pos="20000">
+                  <a:schemeClr val="bg2">
+                    <a:lumMod val="90000"/>
+                    <a:lumOff val="10000"/>
+                    <a:alpha val="60000"/>
+                  </a:schemeClr>
+                </a:gs>
+                <a:gs pos="100000">
+                  <a:schemeClr val="accent1">
+                    <a:lumMod val="60000"/>
+                    <a:lumOff val="40000"/>
+                    <a:alpha val="60000"/>
+                  </a:schemeClr>
+                </a:gs>
+              </a:gsLst>
+              <a:lin ang="0" scaled="0"/>
+              <a:tileRect/>
+            </a:gradFill>
+            <a:ln>
+              <a:noFill/>
+            </a:ln>
+            <a:effectLst>
+              <a:innerShdw blurRad="254000">
+                <a:schemeClr val="bg2"/>
+              </a:innerShdw>
+            </a:effectLst>
+          </p:spPr>
+          <p:style>
+            <a:lnRef idx="2">
+              <a:schemeClr val="accent1">
+                <a:shade val="50000"/>
+              </a:schemeClr>
+            </a:lnRef>
+            <a:fillRef idx="1">
+              <a:schemeClr val="accent1"/>
+            </a:fillRef>
+            <a:effectRef idx="0">
+              <a:schemeClr val="accent1"/>
+            </a:effectRef>
+            <a:fontRef idx="minor">
+              <a:schemeClr val="lt1"/>
+            </a:fontRef>
+          </p:style>
+          <p:txBody>
+            <a:bodyPr rot="0" spcFirstLastPara="0" vertOverflow="overflow" horzOverflow="overflow" vert="horz" wrap="square" lIns="91440" tIns="45720" rIns="91440" bIns="45720" numCol="1" spcCol="0" rtlCol="0" fromWordArt="0" anchor="ctr" anchorCtr="0" forceAA="0" compatLnSpc="1">
+              <a:prstTxWarp prst="textNoShape">
+                <a:avLst/>
+              </a:prstTxWarp>
+              <a:noAutofit/>
+            </a:bodyPr>
+            <a:lstStyle/>
+            <a:p>
+              <a:pPr algn="ctr"/>
+              <a:endParaRPr lang="en-US"/>
+            </a:p>
+          </p:txBody>
+        </p:sp>
+        <p:sp>
+          <p:nvSpPr>
+            <p:cNvPr id="32" name="Freeform 6">
+              <a:extLst>
+                <a:ext uri="{FF2B5EF4-FFF2-40B4-BE49-F238E27FC236}">
+                  <a16:creationId xmlns:a16="http://schemas.microsoft.com/office/drawing/2014/main" id="{DB4D1217-FEB1-4D2A-80F4-C227B66D72C6}"/>
+                </a:ext>
+                <a:ext uri="{C183D7F6-B498-43B3-948B-1728B52AA6E4}">
+                  <adec:decorative xmlns:adec="http://schemas.microsoft.com/office/drawing/2017/decorative" val="1"/>
+                </a:ext>
+              </a:extLst>
+            </p:cNvPr>
+            <p:cNvSpPr>
+              <a:spLocks/>
+            </p:cNvSpPr>
+            <p:nvPr>
+              <p:extLst>
+                <p:ext uri="{386F3935-93C4-4BCD-93E2-E3B085C9AB24}">
+                  <p16:designElem xmlns:p16="http://schemas.microsoft.com/office/powerpoint/2015/main" val="1"/>
+                </p:ext>
+              </p:extLst>
+            </p:nvPr>
+          </p:nvSpPr>
+          <p:spPr bwMode="auto">
+            <a:xfrm rot="3600000">
+              <a:off x="8066503" y="1339815"/>
+              <a:ext cx="305942" cy="538275"/>
+            </a:xfrm>
+            <a:custGeom>
+              <a:avLst/>
+              <a:gdLst>
+                <a:gd name="T0" fmla="*/ 266 w 266"/>
+                <a:gd name="T1" fmla="*/ 468 h 468"/>
+                <a:gd name="T2" fmla="*/ 0 w 266"/>
+                <a:gd name="T3" fmla="*/ 310 h 468"/>
+                <a:gd name="T4" fmla="*/ 0 w 266"/>
+                <a:gd name="T5" fmla="*/ 310 h 468"/>
+                <a:gd name="T6" fmla="*/ 0 w 266"/>
+                <a:gd name="T7" fmla="*/ 0 h 468"/>
+                <a:gd name="T8" fmla="*/ 0 w 266"/>
+                <a:gd name="T9" fmla="*/ 0 h 468"/>
+                <a:gd name="T10" fmla="*/ 266 w 266"/>
+                <a:gd name="T11" fmla="*/ 159 h 468"/>
+                <a:gd name="T12" fmla="*/ 266 w 266"/>
+                <a:gd name="T13" fmla="*/ 468 h 468"/>
+              </a:gdLst>
+              <a:ahLst/>
+              <a:cxnLst>
+                <a:cxn ang="0">
+                  <a:pos x="T0" y="T1"/>
+                </a:cxn>
+                <a:cxn ang="0">
+                  <a:pos x="T2" y="T3"/>
+                </a:cxn>
+                <a:cxn ang="0">
+                  <a:pos x="T4" y="T5"/>
+                </a:cxn>
+                <a:cxn ang="0">
+                  <a:pos x="T6" y="T7"/>
+                </a:cxn>
+                <a:cxn ang="0">
+                  <a:pos x="T8" y="T9"/>
+                </a:cxn>
+                <a:cxn ang="0">
+                  <a:pos x="T10" y="T11"/>
+                </a:cxn>
+                <a:cxn ang="0">
+                  <a:pos x="T12" y="T13"/>
+                </a:cxn>
+              </a:cxnLst>
+              <a:rect l="0" t="0" r="r" b="b"/>
+              <a:pathLst>
+                <a:path w="266" h="468">
+                  <a:moveTo>
+                    <a:pt x="266" y="468"/>
+                  </a:moveTo>
+                  <a:lnTo>
+                    <a:pt x="0" y="310"/>
+                  </a:lnTo>
+                  <a:lnTo>
+                    <a:pt x="0" y="310"/>
+                  </a:lnTo>
+                  <a:lnTo>
+                    <a:pt x="0" y="0"/>
+                  </a:lnTo>
+                  <a:lnTo>
+                    <a:pt x="0" y="0"/>
+                  </a:lnTo>
+                  <a:lnTo>
+                    <a:pt x="266" y="159"/>
+                  </a:lnTo>
+                  <a:lnTo>
+                    <a:pt x="266" y="468"/>
+                  </a:lnTo>
+                  <a:close/>
+                </a:path>
+              </a:pathLst>
+            </a:custGeom>
+            <a:gradFill flip="none" rotWithShape="1">
+              <a:gsLst>
+                <a:gs pos="20000">
+                  <a:schemeClr val="bg2">
+                    <a:lumMod val="90000"/>
+                    <a:lumOff val="10000"/>
+                    <a:alpha val="60000"/>
+                  </a:schemeClr>
+                </a:gs>
+                <a:gs pos="100000">
+                  <a:schemeClr val="accent1">
+                    <a:lumMod val="60000"/>
+                    <a:lumOff val="40000"/>
+                  </a:schemeClr>
+                </a:gs>
+              </a:gsLst>
+              <a:lin ang="18000000" scaled="0"/>
+              <a:tileRect/>
+            </a:gradFill>
+            <a:ln>
+              <a:noFill/>
+            </a:ln>
+            <a:effectLst>
+              <a:innerShdw blurRad="254000">
+                <a:schemeClr val="bg2">
+                  <a:lumMod val="90000"/>
+                  <a:lumOff val="10000"/>
+                </a:schemeClr>
+              </a:innerShdw>
+            </a:effectLst>
+          </p:spPr>
+          <p:style>
+            <a:lnRef idx="2">
+              <a:schemeClr val="accent1">
+                <a:shade val="50000"/>
+              </a:schemeClr>
+            </a:lnRef>
+            <a:fillRef idx="1">
+              <a:schemeClr val="accent1"/>
+            </a:fillRef>
+            <a:effectRef idx="0">
+              <a:schemeClr val="accent1"/>
+            </a:effectRef>
+            <a:fontRef idx="minor">
+              <a:schemeClr val="lt1"/>
+            </a:fontRef>
+          </p:style>
+          <p:txBody>
+            <a:bodyPr rot="0" spcFirstLastPara="0" vertOverflow="overflow" horzOverflow="overflow" vert="horz" wrap="square" lIns="91440" tIns="45720" rIns="91440" bIns="45720" numCol="1" spcCol="0" rtlCol="0" fromWordArt="0" anchor="ctr" anchorCtr="0" forceAA="0" compatLnSpc="1">
+              <a:prstTxWarp prst="textNoShape">
+                <a:avLst/>
+              </a:prstTxWarp>
+              <a:noAutofit/>
+            </a:bodyPr>
+            <a:lstStyle/>
+            <a:p>
+              <a:pPr algn="ctr"/>
+              <a:endParaRPr lang="en-US"/>
+            </a:p>
+          </p:txBody>
+        </p:sp>
+        <p:sp>
+          <p:nvSpPr>
+            <p:cNvPr id="33" name="Freeform 8">
+              <a:extLst>
+                <a:ext uri="{FF2B5EF4-FFF2-40B4-BE49-F238E27FC236}">
+                  <a16:creationId xmlns:a16="http://schemas.microsoft.com/office/drawing/2014/main" id="{0BCA7138-22BA-4785-8B3D-9D45213E85C9}"/>
+                </a:ext>
+                <a:ext uri="{C183D7F6-B498-43B3-948B-1728B52AA6E4}">
+                  <adec:decorative xmlns:adec="http://schemas.microsoft.com/office/drawing/2017/decorative" val="1"/>
+                </a:ext>
+              </a:extLst>
+            </p:cNvPr>
+            <p:cNvSpPr>
+              <a:spLocks/>
+            </p:cNvSpPr>
+            <p:nvPr>
+              <p:extLst>
+                <p:ext uri="{386F3935-93C4-4BCD-93E2-E3B085C9AB24}">
+                  <p16:designElem xmlns:p16="http://schemas.microsoft.com/office/powerpoint/2015/main" val="1"/>
+                </p:ext>
+              </p:extLst>
+            </p:nvPr>
+          </p:nvSpPr>
+          <p:spPr bwMode="auto">
+            <a:xfrm rot="3600000">
+              <a:off x="8217173" y="1608753"/>
+              <a:ext cx="315144" cy="538275"/>
+            </a:xfrm>
+            <a:custGeom>
+              <a:avLst/>
+              <a:gdLst>
+                <a:gd name="T0" fmla="*/ 274 w 274"/>
+                <a:gd name="T1" fmla="*/ 0 h 468"/>
+                <a:gd name="T2" fmla="*/ 274 w 274"/>
+                <a:gd name="T3" fmla="*/ 310 h 468"/>
+                <a:gd name="T4" fmla="*/ 274 w 274"/>
+                <a:gd name="T5" fmla="*/ 310 h 468"/>
+                <a:gd name="T6" fmla="*/ 0 w 274"/>
+                <a:gd name="T7" fmla="*/ 468 h 468"/>
+                <a:gd name="T8" fmla="*/ 0 w 274"/>
+                <a:gd name="T9" fmla="*/ 159 h 468"/>
+                <a:gd name="T10" fmla="*/ 274 w 274"/>
+                <a:gd name="T11" fmla="*/ 0 h 468"/>
+                <a:gd name="T12" fmla="*/ 274 w 274"/>
+                <a:gd name="T13" fmla="*/ 0 h 468"/>
+              </a:gdLst>
+              <a:ahLst/>
+              <a:cxnLst>
+                <a:cxn ang="0">
+                  <a:pos x="T0" y="T1"/>
+                </a:cxn>
+                <a:cxn ang="0">
+                  <a:pos x="T2" y="T3"/>
+                </a:cxn>
+                <a:cxn ang="0">
+                  <a:pos x="T4" y="T5"/>
+                </a:cxn>
+                <a:cxn ang="0">
+                  <a:pos x="T6" y="T7"/>
+                </a:cxn>
+                <a:cxn ang="0">
+                  <a:pos x="T8" y="T9"/>
+                </a:cxn>
+                <a:cxn ang="0">
+                  <a:pos x="T10" y="T11"/>
+                </a:cxn>
+                <a:cxn ang="0">
+                  <a:pos x="T12" y="T13"/>
+                </a:cxn>
+              </a:cxnLst>
+              <a:rect l="0" t="0" r="r" b="b"/>
+              <a:pathLst>
+                <a:path w="274" h="468">
+                  <a:moveTo>
+                    <a:pt x="274" y="0"/>
+                  </a:moveTo>
+                  <a:lnTo>
+                    <a:pt x="274" y="310"/>
+                  </a:lnTo>
+                  <a:lnTo>
+                    <a:pt x="274" y="310"/>
+                  </a:lnTo>
+                  <a:lnTo>
+                    <a:pt x="0" y="468"/>
+                  </a:lnTo>
+                  <a:lnTo>
+                    <a:pt x="0" y="159"/>
+                  </a:lnTo>
+                  <a:lnTo>
+                    <a:pt x="274" y="0"/>
+                  </a:lnTo>
+                  <a:lnTo>
+                    <a:pt x="274" y="0"/>
+                  </a:lnTo>
+                  <a:close/>
+                </a:path>
+              </a:pathLst>
+            </a:custGeom>
+            <a:gradFill flip="none" rotWithShape="1">
+              <a:gsLst>
+                <a:gs pos="20000">
+                  <a:schemeClr val="bg2">
+                    <a:lumMod val="90000"/>
+                    <a:lumOff val="10000"/>
+                    <a:alpha val="60000"/>
+                  </a:schemeClr>
+                </a:gs>
+                <a:gs pos="100000">
+                  <a:schemeClr val="accent1">
+                    <a:lumMod val="60000"/>
+                    <a:lumOff val="40000"/>
+                    <a:alpha val="60000"/>
+                  </a:schemeClr>
+                </a:gs>
+              </a:gsLst>
+              <a:lin ang="18000000" scaled="0"/>
+              <a:tileRect/>
+            </a:gradFill>
+            <a:ln>
+              <a:noFill/>
+            </a:ln>
+            <a:effectLst>
+              <a:innerShdw blurRad="508000">
+                <a:schemeClr val="bg2"/>
+              </a:innerShdw>
+            </a:effectLst>
+          </p:spPr>
+          <p:style>
+            <a:lnRef idx="2">
+              <a:schemeClr val="accent1">
+                <a:shade val="50000"/>
+              </a:schemeClr>
+            </a:lnRef>
+            <a:fillRef idx="1">
+              <a:schemeClr val="accent1"/>
+            </a:fillRef>
+            <a:effectRef idx="0">
+              <a:schemeClr val="accent1"/>
+            </a:effectRef>
+            <a:fontRef idx="minor">
+              <a:schemeClr val="lt1"/>
+            </a:fontRef>
+          </p:style>
+          <p:txBody>
+            <a:bodyPr rot="0" spcFirstLastPara="0" vertOverflow="overflow" horzOverflow="overflow" vert="horz" wrap="square" lIns="91440" tIns="45720" rIns="91440" bIns="45720" numCol="1" spcCol="0" rtlCol="0" fromWordArt="0" anchor="ctr" anchorCtr="0" forceAA="0" compatLnSpc="1">
+              <a:prstTxWarp prst="textNoShape">
+                <a:avLst/>
+              </a:prstTxWarp>
+              <a:noAutofit/>
+            </a:bodyPr>
+            <a:lstStyle/>
+            <a:p>
+              <a:pPr algn="ctr"/>
+              <a:endParaRPr lang="en-US"/>
+            </a:p>
+          </p:txBody>
+        </p:sp>
+      </p:grpSp>
+      <p:pic>
+        <p:nvPicPr>
+          <p:cNvPr id="5" name="Content Placeholder 4">
+            <a:extLst>
+              <a:ext uri="{FF2B5EF4-FFF2-40B4-BE49-F238E27FC236}">
+                <a16:creationId xmlns:a16="http://schemas.microsoft.com/office/drawing/2014/main" id="{06605170-2F25-079C-212E-61065ACEB255}"/>
+              </a:ext>
+            </a:extLst>
+          </p:cNvPr>
+          <p:cNvPicPr>
+            <a:picLocks noGrp="1" noChangeAspect="1"/>
+          </p:cNvPicPr>
+          <p:nvPr>
+            <p:ph sz="half" idx="1"/>
+          </p:nvPr>
+        </p:nvPicPr>
+        <p:blipFill>
+          <a:blip r:embed="rId2">
+            <a:extLst>
+              <a:ext uri="{28A0092B-C50C-407E-A947-70E740481C1C}">
+                <a14:useLocalDpi xmlns:a14="http://schemas.microsoft.com/office/drawing/2010/main" val="0"/>
+              </a:ext>
+            </a:extLst>
+          </a:blip>
+          <a:srcRect l="8334" t="9716" r="14526" b="-3"/>
+          <a:stretch>
+            <a:fillRect/>
+          </a:stretch>
+        </p:blipFill>
+        <p:spPr>
+          <a:xfrm>
+            <a:off x="4616123" y="1368962"/>
+            <a:ext cx="7345363" cy="3911406"/>
+          </a:xfrm>
+          <a:custGeom>
+            <a:avLst/>
+            <a:gdLst/>
+            <a:ahLst/>
+            <a:cxnLst/>
+            <a:rect l="l" t="t" r="r" b="b"/>
+            <a:pathLst>
+              <a:path w="7345363" h="5761037">
+                <a:moveTo>
+                  <a:pt x="0" y="0"/>
+                </a:moveTo>
+                <a:lnTo>
+                  <a:pt x="7345363" y="0"/>
+                </a:lnTo>
+                <a:lnTo>
+                  <a:pt x="7345363" y="5761037"/>
+                </a:lnTo>
+                <a:lnTo>
+                  <a:pt x="0" y="5761037"/>
+                </a:lnTo>
+                <a:close/>
+              </a:path>
+            </a:pathLst>
+          </a:custGeom>
+          <a:noFill/>
+        </p:spPr>
+      </p:pic>
+      <p:sp>
+        <p:nvSpPr>
+          <p:cNvPr id="6" name="TextBox 5">
+            <a:extLst>
+              <a:ext uri="{FF2B5EF4-FFF2-40B4-BE49-F238E27FC236}">
+                <a16:creationId xmlns:a16="http://schemas.microsoft.com/office/drawing/2014/main" id="{50C7722F-B67D-39A1-F07F-70DFFC7E0C9E}"/>
+              </a:ext>
+            </a:extLst>
+          </p:cNvPr>
+          <p:cNvSpPr txBox="1"/>
+          <p:nvPr/>
+        </p:nvSpPr>
+        <p:spPr>
+          <a:xfrm>
+            <a:off x="19582" y="3698557"/>
+            <a:ext cx="4675955" cy="1477328"/>
+          </a:xfrm>
+          <a:prstGeom prst="rect">
+            <a:avLst/>
+          </a:prstGeom>
           <a:noFill/>
         </p:spPr>
         <p:txBody>
-          <a:bodyPr anchor="t">
-            <a:noAutofit/>
+          <a:bodyPr wrap="square" rtlCol="0">
+            <a:spAutoFit/>
           </a:bodyPr>
           <a:lstStyle/>
           <a:p>
+            <a:pPr algn="ctr"/>
             <a:r>
-              <a:rPr lang="en-US" dirty="0"/>
-              <a:t>Git Hub &amp; Power Bi Links</a:t>
+              <a:rPr lang="en-US" dirty="0">
+                <a:hlinkClick r:id="rId3"/>
+              </a:rPr>
+              <a:t>https://github.com/Sharya-wolf/Capstone_3.git</a:t>
             </a:r>
-          </a:p>
-        </p:txBody>
-      </p:sp>
-      <p:sp>
-        <p:nvSpPr>
-          <p:cNvPr id="8" name="Content Placeholder 7">
-            <a:extLst>
-              <a:ext uri="{FF2B5EF4-FFF2-40B4-BE49-F238E27FC236}">
-                <a16:creationId xmlns:a16="http://schemas.microsoft.com/office/drawing/2014/main" id="{215CE58D-2739-522B-7C3A-6A7C985360C0}"/>
-              </a:ext>
-            </a:extLst>
-          </p:cNvPr>
-          <p:cNvSpPr>
-            <a:spLocks noGrp="1"/>
-          </p:cNvSpPr>
-          <p:nvPr>
-            <p:ph sz="half" idx="1"/>
-          </p:nvPr>
-        </p:nvSpPr>
-        <p:spPr>
-          <a:noFill/>
-        </p:spPr>
-        <p:txBody>
-          <a:bodyPr vert="horz" lIns="0" tIns="0" rIns="91440" bIns="45720" rtlCol="0" anchor="t">
-            <a:normAutofit/>
-          </a:bodyPr>
-          <a:lstStyle/>
-          <a:p>
             <a:endParaRPr lang="en-US" dirty="0"/>
           </a:p>
-        </p:txBody>
-      </p:sp>
-      <p:sp>
-        <p:nvSpPr>
-          <p:cNvPr id="4" name="Table Placeholder 3">
-            <a:extLst>
-              <a:ext uri="{FF2B5EF4-FFF2-40B4-BE49-F238E27FC236}">
-                <a16:creationId xmlns:a16="http://schemas.microsoft.com/office/drawing/2014/main" id="{64BE1DC6-1F72-B1E8-C80D-F0EC45CF8024}"/>
-              </a:ext>
-            </a:extLst>
-          </p:cNvPr>
-          <p:cNvSpPr>
-            <a:spLocks noGrp="1"/>
-          </p:cNvSpPr>
-          <p:nvPr>
-            <p:ph type="tbl" sz="quarter" idx="13"/>
-          </p:nvPr>
-        </p:nvSpPr>
-        <p:spPr/>
-        <p:txBody>
-          <a:bodyPr/>
-          <a:lstStyle/>
-          <a:p>
-            <a:endParaRPr lang="en-US"/>
+          <a:p>
+            <a:endParaRPr lang="en-US" dirty="0"/>
+          </a:p>
+          <a:p>
+            <a:pPr algn="ctr"/>
+            <a:r>
+              <a:rPr lang="en-US" dirty="0">
+                <a:hlinkClick r:id="rId4"/>
+              </a:rPr>
+              <a:t>Weaver's Power BI Link</a:t>
+            </a:r>
+            <a:endParaRPr lang="en-US" dirty="0"/>
+          </a:p>
+          <a:p>
+            <a:endParaRPr lang="en-US" dirty="0"/>
+          </a:p>
+          <a:p>
+            <a:endParaRPr lang="en-US" dirty="0"/>
           </a:p>
         </p:txBody>
       </p:sp>
@@ -16759,7 +20384,7 @@
 </p:sld>
 </file>
 
-<file path=ppt/slides/slide8.xml><?xml version="1.0" encoding="utf-8"?>
+<file path=ppt/slides/slide9.xml><?xml version="1.0" encoding="utf-8"?>
 <p:sld xmlns:a="http://schemas.openxmlformats.org/drawingml/2006/main" xmlns:r="http://schemas.openxmlformats.org/officeDocument/2006/relationships" xmlns:p="http://schemas.openxmlformats.org/presentationml/2006/main">
   <p:cSld>
     <p:spTree>
@@ -16803,37 +20428,8 @@
           <a:p>
             <a:r>
               <a:rPr lang="en-US" dirty="0"/>
-              <a:t>Thank you</a:t>
+              <a:t>Thank you!</a:t>
             </a:r>
-          </a:p>
-        </p:txBody>
-      </p:sp>
-      <p:sp>
-        <p:nvSpPr>
-          <p:cNvPr id="3" name="Content Placeholder 2">
-            <a:extLst>
-              <a:ext uri="{FF2B5EF4-FFF2-40B4-BE49-F238E27FC236}">
-                <a16:creationId xmlns:a16="http://schemas.microsoft.com/office/drawing/2014/main" id="{1BE98EFF-197D-3136-70B9-7BBD30A48931}"/>
-              </a:ext>
-            </a:extLst>
-          </p:cNvPr>
-          <p:cNvSpPr>
-            <a:spLocks noGrp="1"/>
-          </p:cNvSpPr>
-          <p:nvPr>
-            <p:ph idx="1"/>
-          </p:nvPr>
-        </p:nvSpPr>
-        <p:spPr>
-          <a:noFill/>
-        </p:spPr>
-        <p:txBody>
-          <a:bodyPr>
-            <a:normAutofit/>
-          </a:bodyPr>
-          <a:lstStyle/>
-          <a:p>
-            <a:endParaRPr lang="en-US" dirty="0"/>
           </a:p>
         </p:txBody>
       </p:sp>
@@ -17671,6 +21267,26 @@
 </file>
 
 <file path=customXml/item1.xml><?xml version="1.0" encoding="utf-8"?>
+<p:properties xmlns:p="http://schemas.microsoft.com/office/2006/metadata/properties" xmlns:xsi="http://www.w3.org/2001/XMLSchema-instance" xmlns:pc="http://schemas.microsoft.com/office/infopath/2007/PartnerControls">
+  <documentManagement>
+    <_ip_UnifiedCompliancePolicyUIAction xmlns="http://schemas.microsoft.com/sharepoint/v3" xsi:nil="true"/>
+    <Image xmlns="71af3243-3dd4-4a8d-8c0d-dd76da1f02a5">
+      <Url xsi:nil="true"/>
+      <Description xsi:nil="true"/>
+    </Image>
+    <Status xmlns="71af3243-3dd4-4a8d-8c0d-dd76da1f02a5">Not started</Status>
+    <Background xmlns="71af3243-3dd4-4a8d-8c0d-dd76da1f02a5">false</Background>
+    <_ip_UnifiedCompliancePolicyProperties xmlns="http://schemas.microsoft.com/sharepoint/v3" xsi:nil="true"/>
+    <ImageTagsTaxHTField xmlns="71af3243-3dd4-4a8d-8c0d-dd76da1f02a5">
+      <Terms xmlns="http://schemas.microsoft.com/office/infopath/2007/PartnerControls"/>
+    </ImageTagsTaxHTField>
+    <TaxCatchAll xmlns="230e9df3-be65-4c73-a93b-d1236ebd677e" xsi:nil="true"/>
+    <MediaServiceKeyPoints xmlns="71af3243-3dd4-4a8d-8c0d-dd76da1f02a5" xsi:nil="true"/>
+  </documentManagement>
+</p:properties>
+</file>
+
+<file path=customXml/item2.xml><?xml version="1.0" encoding="utf-8"?>
 <ct:contentTypeSchema xmlns:ct="http://schemas.microsoft.com/office/2006/metadata/contentType" xmlns:ma="http://schemas.microsoft.com/office/2006/metadata/properties/metaAttributes" ct:_="" ma:_="" ma:contentTypeName="Document" ma:contentTypeID="0x01010079F111ED35F8CC479449609E8A0923A6" ma:contentTypeVersion="28" ma:contentTypeDescription="Create a new document." ma:contentTypeScope="" ma:versionID="60f5a4f2d2b0abadcf532d48ebf9cb71">
   <xsd:schema xmlns:xsd="http://www.w3.org/2001/XMLSchema" xmlns:xs="http://www.w3.org/2001/XMLSchema" xmlns:p="http://schemas.microsoft.com/office/2006/metadata/properties" xmlns:ns1="http://schemas.microsoft.com/sharepoint/v3" xmlns:ns2="71af3243-3dd4-4a8d-8c0d-dd76da1f02a5" xmlns:ns3="16c05727-aa75-4e4a-9b5f-8a80a1165891" xmlns:ns4="230e9df3-be65-4c73-a93b-d1236ebd677e" targetNamespace="http://schemas.microsoft.com/office/2006/metadata/properties" ma:root="true" ma:fieldsID="7dd78129e6a1811f84807ad11c651531" ns1:_="" ns2:_="" ns3:_="" ns4:_="">
     <xsd:import namespace="http://schemas.microsoft.com/sharepoint/v3"/>
@@ -17982,26 +21598,6 @@
 </ct:contentTypeSchema>
 </file>
 
-<file path=customXml/item2.xml><?xml version="1.0" encoding="utf-8"?>
-<p:properties xmlns:p="http://schemas.microsoft.com/office/2006/metadata/properties" xmlns:xsi="http://www.w3.org/2001/XMLSchema-instance" xmlns:pc="http://schemas.microsoft.com/office/infopath/2007/PartnerControls">
-  <documentManagement>
-    <_ip_UnifiedCompliancePolicyUIAction xmlns="http://schemas.microsoft.com/sharepoint/v3" xsi:nil="true"/>
-    <Image xmlns="71af3243-3dd4-4a8d-8c0d-dd76da1f02a5">
-      <Url xsi:nil="true"/>
-      <Description xsi:nil="true"/>
-    </Image>
-    <Status xmlns="71af3243-3dd4-4a8d-8c0d-dd76da1f02a5">Not started</Status>
-    <Background xmlns="71af3243-3dd4-4a8d-8c0d-dd76da1f02a5">false</Background>
-    <_ip_UnifiedCompliancePolicyProperties xmlns="http://schemas.microsoft.com/sharepoint/v3" xsi:nil="true"/>
-    <ImageTagsTaxHTField xmlns="71af3243-3dd4-4a8d-8c0d-dd76da1f02a5">
-      <Terms xmlns="http://schemas.microsoft.com/office/infopath/2007/PartnerControls"/>
-    </ImageTagsTaxHTField>
-    <TaxCatchAll xmlns="230e9df3-be65-4c73-a93b-d1236ebd677e" xsi:nil="true"/>
-    <MediaServiceKeyPoints xmlns="71af3243-3dd4-4a8d-8c0d-dd76da1f02a5" xsi:nil="true"/>
-  </documentManagement>
-</p:properties>
-</file>
-
 <file path=customXml/item3.xml><?xml version="1.0" encoding="utf-8"?>
 <?mso-contentType ?>
 <FormTemplates xmlns="http://schemas.microsoft.com/sharepoint/v3/contenttype/forms">
@@ -18012,6 +21608,25 @@
 </file>
 
 <file path=customXml/itemProps1.xml><?xml version="1.0" encoding="utf-8"?>
+<ds:datastoreItem xmlns:ds="http://schemas.openxmlformats.org/officeDocument/2006/customXml" ds:itemID="{1F342EE1-43E5-4AFB-895D-B61B9656DC14}">
+  <ds:schemaRefs>
+    <ds:schemaRef ds:uri="http://purl.org/dc/dcmitype/"/>
+    <ds:schemaRef ds:uri="http://purl.org/dc/terms/"/>
+    <ds:schemaRef ds:uri="http://schemas.microsoft.com/office/2006/documentManagement/types"/>
+    <ds:schemaRef ds:uri="http://www.w3.org/XML/1998/namespace"/>
+    <ds:schemaRef ds:uri="http://schemas.microsoft.com/office/infopath/2007/PartnerControls"/>
+    <ds:schemaRef ds:uri="http://schemas.microsoft.com/office/2006/metadata/properties"/>
+    <ds:schemaRef ds:uri="16c05727-aa75-4e4a-9b5f-8a80a1165891"/>
+    <ds:schemaRef ds:uri="http://schemas.openxmlformats.org/package/2006/metadata/core-properties"/>
+    <ds:schemaRef ds:uri="http://schemas.microsoft.com/sharepoint/v3"/>
+    <ds:schemaRef ds:uri="http://purl.org/dc/elements/1.1/"/>
+    <ds:schemaRef ds:uri="230e9df3-be65-4c73-a93b-d1236ebd677e"/>
+    <ds:schemaRef ds:uri="71af3243-3dd4-4a8d-8c0d-dd76da1f02a5"/>
+  </ds:schemaRefs>
+</ds:datastoreItem>
+</file>
+
+<file path=customXml/itemProps2.xml><?xml version="1.0" encoding="utf-8"?>
 <ds:datastoreItem xmlns:ds="http://schemas.openxmlformats.org/officeDocument/2006/customXml" ds:itemID="{797783A8-901D-4F73-81D7-AA6841BEB3D7}">
   <ds:schemaRefs>
     <ds:schemaRef ds:uri="http://schemas.microsoft.com/office/2006/metadata/contentType"/>
@@ -18032,25 +21647,6 @@
 </ds:datastoreItem>
 </file>
 
-<file path=customXml/itemProps2.xml><?xml version="1.0" encoding="utf-8"?>
-<ds:datastoreItem xmlns:ds="http://schemas.openxmlformats.org/officeDocument/2006/customXml" ds:itemID="{1F342EE1-43E5-4AFB-895D-B61B9656DC14}">
-  <ds:schemaRefs>
-    <ds:schemaRef ds:uri="http://schemas.microsoft.com/office/2006/documentManagement/types"/>
-    <ds:schemaRef ds:uri="http://schemas.microsoft.com/sharepoint/v3"/>
-    <ds:schemaRef ds:uri="http://purl.org/dc/dcmitype/"/>
-    <ds:schemaRef ds:uri="http://purl.org/dc/elements/1.1/"/>
-    <ds:schemaRef ds:uri="http://purl.org/dc/terms/"/>
-    <ds:schemaRef ds:uri="http://schemas.microsoft.com/office/infopath/2007/PartnerControls"/>
-    <ds:schemaRef ds:uri="http://schemas.microsoft.com/office/2006/metadata/properties"/>
-    <ds:schemaRef ds:uri="http://www.w3.org/XML/1998/namespace"/>
-    <ds:schemaRef ds:uri="http://schemas.openxmlformats.org/package/2006/metadata/core-properties"/>
-    <ds:schemaRef ds:uri="230e9df3-be65-4c73-a93b-d1236ebd677e"/>
-    <ds:schemaRef ds:uri="16c05727-aa75-4e4a-9b5f-8a80a1165891"/>
-    <ds:schemaRef ds:uri="71af3243-3dd4-4a8d-8c0d-dd76da1f02a5"/>
-  </ds:schemaRefs>
-</ds:datastoreItem>
-</file>
-
 <file path=customXml/itemProps3.xml><?xml version="1.0" encoding="utf-8"?>
 <ds:datastoreItem xmlns:ds="http://schemas.openxmlformats.org/officeDocument/2006/customXml" ds:itemID="{2F49CD38-5B57-4682-9FCE-B9174068D0AE}">
   <ds:schemaRefs>
